--- a/奇異恩典_不再綑綁.pptx
+++ b/奇異恩典_不再綑綁.pptx
@@ -5,13 +5,19 @@
     <p:sldMasterId id="2147483660" r:id="rId1"/>
   </p:sldMasterIdLst>
   <p:sldIdLst>
-    <p:sldId id="257" r:id="rId2"/>
-    <p:sldId id="258" r:id="rId3"/>
-    <p:sldId id="259" r:id="rId4"/>
-    <p:sldId id="260" r:id="rId5"/>
-    <p:sldId id="261" r:id="rId6"/>
-    <p:sldId id="262" r:id="rId7"/>
-    <p:sldId id="263" r:id="rId8"/>
+    <p:sldId id="264" r:id="rId2"/>
+    <p:sldId id="265" r:id="rId3"/>
+    <p:sldId id="266" r:id="rId4"/>
+    <p:sldId id="267" r:id="rId5"/>
+    <p:sldId id="268" r:id="rId6"/>
+    <p:sldId id="269" r:id="rId7"/>
+    <p:sldId id="270" r:id="rId8"/>
+    <p:sldId id="271" r:id="rId9"/>
+    <p:sldId id="272" r:id="rId10"/>
+    <p:sldId id="273" r:id="rId11"/>
+    <p:sldId id="274" r:id="rId12"/>
+    <p:sldId id="275" r:id="rId13"/>
+    <p:sldId id="276" r:id="rId14"/>
   </p:sldIdLst>
   <p:sldSz cx="9144000" cy="5143500" type="screen16x9"/>
   <p:notesSz cx="6858000" cy="9144000"/>
@@ -110,6 +116,22 @@
       </a:defRPr>
     </a:lvl9pPr>
   </p:defaultTextStyle>
+  <p:extLst>
+    <p:ext uri="{EFAFB233-063F-42B5-8137-9DF3F51BA10A}">
+      <p15:sldGuideLst xmlns:p15="http://schemas.microsoft.com/office/powerpoint/2012/main">
+        <p15:guide id="1" orient="horz" pos="1620">
+          <p15:clr>
+            <a:srgbClr val="A4A3A4"/>
+          </p15:clr>
+        </p15:guide>
+        <p15:guide id="2" pos="2880">
+          <p15:clr>
+            <a:srgbClr val="A4A3A4"/>
+          </p15:clr>
+        </p15:guide>
+      </p15:sldGuideLst>
+    </p:ext>
+  </p:extLst>
 </p:presentation>
 </file>
 
@@ -294,7 +316,7 @@
           <a:p>
             <a:fld id="{5826C3C4-BA31-49FC-9478-D3D8F0BC1222}" type="datetimeFigureOut">
               <a:rPr lang="en-US" smtClean="0"/>
-              <a:t>8/3/2019</a:t>
+              <a:t>8/1/2026</a:t>
             </a:fld>
             <a:endParaRPr lang="en-US"/>
           </a:p>
@@ -459,7 +481,7 @@
           <a:p>
             <a:fld id="{5826C3C4-BA31-49FC-9478-D3D8F0BC1222}" type="datetimeFigureOut">
               <a:rPr lang="en-US" smtClean="0"/>
-              <a:t>8/3/2019</a:t>
+              <a:t>8/1/2026</a:t>
             </a:fld>
             <a:endParaRPr lang="en-US"/>
           </a:p>
@@ -634,7 +656,7 @@
           <a:p>
             <a:fld id="{5826C3C4-BA31-49FC-9478-D3D8F0BC1222}" type="datetimeFigureOut">
               <a:rPr lang="en-US" smtClean="0"/>
-              <a:t>8/3/2019</a:t>
+              <a:t>8/1/2026</a:t>
             </a:fld>
             <a:endParaRPr lang="en-US"/>
           </a:p>
@@ -799,7 +821,7 @@
           <a:p>
             <a:fld id="{5826C3C4-BA31-49FC-9478-D3D8F0BC1222}" type="datetimeFigureOut">
               <a:rPr lang="en-US" smtClean="0"/>
-              <a:t>8/3/2019</a:t>
+              <a:t>8/1/2026</a:t>
             </a:fld>
             <a:endParaRPr lang="en-US"/>
           </a:p>
@@ -1040,7 +1062,7 @@
           <a:p>
             <a:fld id="{5826C3C4-BA31-49FC-9478-D3D8F0BC1222}" type="datetimeFigureOut">
               <a:rPr lang="en-US" smtClean="0"/>
-              <a:t>8/3/2019</a:t>
+              <a:t>8/1/2026</a:t>
             </a:fld>
             <a:endParaRPr lang="en-US"/>
           </a:p>
@@ -1323,7 +1345,7 @@
           <a:p>
             <a:fld id="{5826C3C4-BA31-49FC-9478-D3D8F0BC1222}" type="datetimeFigureOut">
               <a:rPr lang="en-US" smtClean="0"/>
-              <a:t>8/3/2019</a:t>
+              <a:t>8/1/2026</a:t>
             </a:fld>
             <a:endParaRPr lang="en-US"/>
           </a:p>
@@ -1740,7 +1762,7 @@
           <a:p>
             <a:fld id="{5826C3C4-BA31-49FC-9478-D3D8F0BC1222}" type="datetimeFigureOut">
               <a:rPr lang="en-US" smtClean="0"/>
-              <a:t>8/3/2019</a:t>
+              <a:t>8/1/2026</a:t>
             </a:fld>
             <a:endParaRPr lang="en-US"/>
           </a:p>
@@ -1853,7 +1875,7 @@
           <a:p>
             <a:fld id="{5826C3C4-BA31-49FC-9478-D3D8F0BC1222}" type="datetimeFigureOut">
               <a:rPr lang="en-US" smtClean="0"/>
-              <a:t>8/3/2019</a:t>
+              <a:t>8/1/2026</a:t>
             </a:fld>
             <a:endParaRPr lang="en-US"/>
           </a:p>
@@ -1943,7 +1965,7 @@
           <a:p>
             <a:fld id="{5826C3C4-BA31-49FC-9478-D3D8F0BC1222}" type="datetimeFigureOut">
               <a:rPr lang="en-US" smtClean="0"/>
-              <a:t>8/3/2019</a:t>
+              <a:t>8/1/2026</a:t>
             </a:fld>
             <a:endParaRPr lang="en-US"/>
           </a:p>
@@ -2215,7 +2237,7 @@
           <a:p>
             <a:fld id="{5826C3C4-BA31-49FC-9478-D3D8F0BC1222}" type="datetimeFigureOut">
               <a:rPr lang="en-US" smtClean="0"/>
-              <a:t>8/3/2019</a:t>
+              <a:t>8/1/2026</a:t>
             </a:fld>
             <a:endParaRPr lang="en-US"/>
           </a:p>
@@ -2467,7 +2489,7 @@
           <a:p>
             <a:fld id="{5826C3C4-BA31-49FC-9478-D3D8F0BC1222}" type="datetimeFigureOut">
               <a:rPr lang="en-US" smtClean="0"/>
-              <a:t>8/3/2019</a:t>
+              <a:t>8/1/2026</a:t>
             </a:fld>
             <a:endParaRPr lang="en-US"/>
           </a:p>
@@ -2680,7 +2702,7 @@
           <a:p>
             <a:fld id="{5826C3C4-BA31-49FC-9478-D3D8F0BC1222}" type="datetimeFigureOut">
               <a:rPr lang="en-US" smtClean="0"/>
-              <a:t>8/3/2019</a:t>
+              <a:t>8/1/2026</a:t>
             </a:fld>
             <a:endParaRPr lang="en-US"/>
           </a:p>
@@ -3038,7 +3060,13 @@
   <p:cSld>
     <p:spTree>
       <p:nvGrpSpPr>
-        <p:cNvPr id="1" name=""/>
+        <p:cNvPr id="1" name="">
+          <a:extLst>
+            <a:ext uri="{FF2B5EF4-FFF2-40B4-BE49-F238E27FC236}">
+              <a16:creationId xmlns:a16="http://schemas.microsoft.com/office/drawing/2014/main" id="{5F20F3D7-EDDF-CE30-9060-314A88E3730B}"/>
+            </a:ext>
+          </a:extLst>
+        </p:cNvPr>
         <p:cNvGrpSpPr/>
         <p:nvPr/>
       </p:nvGrpSpPr>
@@ -3052,7 +3080,13 @@
       </p:grpSpPr>
       <p:sp>
         <p:nvSpPr>
-          <p:cNvPr id="2" name="Title 1"/>
+          <p:cNvPr id="4" name="標題 3">
+            <a:extLst>
+              <a:ext uri="{FF2B5EF4-FFF2-40B4-BE49-F238E27FC236}">
+                <a16:creationId xmlns:a16="http://schemas.microsoft.com/office/drawing/2014/main" id="{CD6A41DD-B5E6-D530-EC0F-85726817D119}"/>
+              </a:ext>
+            </a:extLst>
+          </p:cNvPr>
           <p:cNvSpPr>
             <a:spLocks noGrp="1"/>
           </p:cNvSpPr>
@@ -3060,88 +3094,150 @@
             <p:ph type="title"/>
           </p:nvPr>
         </p:nvSpPr>
-        <p:spPr/>
-        <p:txBody>
-          <a:bodyPr>
-            <a:normAutofit/>
-          </a:bodyPr>
-          <a:lstStyle/>
-          <a:p>
-            <a:r>
-              <a:rPr lang="zh-TW" altLang="en-US" sz="4000" b="1" dirty="0" smtClean="0">
-                <a:solidFill>
-                  <a:srgbClr val="000066"/>
-                </a:solidFill>
-                <a:latin typeface="微軟正黑體" pitchFamily="34" charset="-120"/>
-                <a:ea typeface="微軟正黑體" pitchFamily="34" charset="-120"/>
-              </a:rPr>
-              <a:t>奇異恩典</a:t>
-            </a:r>
-            <a:r>
-              <a:rPr lang="zh-CN" altLang="en-US" sz="4000" b="1" dirty="0" smtClean="0">
-                <a:solidFill>
-                  <a:srgbClr val="000066"/>
-                </a:solidFill>
-                <a:latin typeface="微軟正黑體" pitchFamily="34" charset="-120"/>
-                <a:ea typeface="微軟正黑體" pitchFamily="34" charset="-120"/>
-              </a:rPr>
-              <a:t>（</a:t>
-            </a:r>
-            <a:r>
-              <a:rPr lang="zh-TW" altLang="en-US" sz="4000" b="1" dirty="0" smtClean="0">
-                <a:solidFill>
-                  <a:srgbClr val="000066"/>
-                </a:solidFill>
-                <a:latin typeface="微軟正黑體" pitchFamily="34" charset="-120"/>
-                <a:ea typeface="微軟正黑體" pitchFamily="34" charset="-120"/>
-              </a:rPr>
-              <a:t>不再綑綁</a:t>
-            </a:r>
-            <a:r>
-              <a:rPr lang="zh-CN" altLang="en-US" sz="4000" b="1" dirty="0" smtClean="0">
-                <a:solidFill>
-                  <a:srgbClr val="000066"/>
-                </a:solidFill>
-                <a:latin typeface="微軟正黑體" pitchFamily="34" charset="-120"/>
-                <a:ea typeface="微軟正黑體" pitchFamily="34" charset="-120"/>
-              </a:rPr>
-              <a:t>）</a:t>
-            </a:r>
-            <a:endParaRPr lang="en-US" sz="4000" dirty="0"/>
-          </a:p>
-        </p:txBody>
-      </p:sp>
-      <p:sp>
-        <p:nvSpPr>
-          <p:cNvPr id="3" name="Content Placeholder 2"/>
-          <p:cNvSpPr>
-            <a:spLocks noGrp="1"/>
-          </p:cNvSpPr>
-          <p:nvPr>
-            <p:ph idx="1"/>
-          </p:nvPr>
-        </p:nvSpPr>
-        <p:spPr/>
+        <p:spPr>
+          <a:xfrm>
+            <a:off x="0" y="1995686"/>
+            <a:ext cx="9144000" cy="857250"/>
+          </a:xfrm>
+        </p:spPr>
         <p:txBody>
           <a:bodyPr>
             <a:noAutofit/>
           </a:bodyPr>
           <a:lstStyle/>
           <a:p>
-            <a:pPr algn="ctr">
-              <a:buNone/>
-            </a:pPr>
-            <a:r>
-              <a:rPr lang="zh-TW" altLang="en-US" sz="4800" b="1" dirty="0" smtClean="0">
-                <a:solidFill>
-                  <a:srgbClr val="000066"/>
-                </a:solidFill>
+            <a:r>
+              <a:rPr lang="zh-TW" altLang="en-US" sz="5400" b="1" i="1" dirty="0">
+                <a:solidFill>
+                  <a:srgbClr val="000066"/>
+                </a:solidFill>
+                <a:effectLst>
+                  <a:outerShdw blurRad="38100" dist="38100" dir="2700000" algn="tl">
+                    <a:srgbClr val="000000">
+                      <a:alpha val="43137"/>
+                    </a:srgbClr>
+                  </a:outerShdw>
+                </a:effectLst>
                 <a:latin typeface="微軟正黑體" pitchFamily="34" charset="-120"/>
                 <a:ea typeface="微軟正黑體" pitchFamily="34" charset="-120"/>
               </a:rPr>
-              <a:t>奇異恩典 何等甘甜 </a:t>
-            </a:r>
-            <a:endParaRPr lang="en-US" altLang="zh-TW" sz="4800" b="1" dirty="0" smtClean="0">
+              <a:t>奇異恩典（不再綑綁）</a:t>
+            </a:r>
+            <a:endParaRPr lang="zh-TW" altLang="en-US" sz="5400" b="1" i="1" dirty="0">
+              <a:solidFill>
+                <a:srgbClr val="000066"/>
+              </a:solidFill>
+              <a:effectLst>
+                <a:outerShdw blurRad="38100" dist="38100" dir="2700000" algn="tl">
+                  <a:srgbClr val="000000">
+                    <a:alpha val="43137"/>
+                  </a:srgbClr>
+                </a:outerShdw>
+              </a:effectLst>
+              <a:latin typeface="微軟正黑體" pitchFamily="34" charset="-120"/>
+              <a:ea typeface="微軟正黑體" pitchFamily="34" charset="-120"/>
+            </a:endParaRPr>
+          </a:p>
+        </p:txBody>
+      </p:sp>
+    </p:spTree>
+    <p:extLst>
+      <p:ext uri="{BB962C8B-B14F-4D97-AF65-F5344CB8AC3E}">
+        <p14:creationId xmlns:p14="http://schemas.microsoft.com/office/powerpoint/2010/main" val="1703679777"/>
+      </p:ext>
+    </p:extLst>
+  </p:cSld>
+  <p:clrMapOvr>
+    <a:masterClrMapping/>
+  </p:clrMapOvr>
+</p:sld>
+</file>
+
+<file path=ppt/slides/slide10.xml><?xml version="1.0" encoding="utf-8"?>
+<p:sld xmlns:a="http://schemas.openxmlformats.org/drawingml/2006/main" xmlns:r="http://schemas.openxmlformats.org/officeDocument/2006/relationships" xmlns:p="http://schemas.openxmlformats.org/presentationml/2006/main">
+  <p:cSld>
+    <p:spTree>
+      <p:nvGrpSpPr>
+        <p:cNvPr id="1" name="">
+          <a:extLst>
+            <a:ext uri="{FF2B5EF4-FFF2-40B4-BE49-F238E27FC236}">
+              <a16:creationId xmlns:a16="http://schemas.microsoft.com/office/drawing/2014/main" id="{499F6A04-361B-D03C-72FC-83746A3861FC}"/>
+            </a:ext>
+          </a:extLst>
+        </p:cNvPr>
+        <p:cNvGrpSpPr/>
+        <p:nvPr/>
+      </p:nvGrpSpPr>
+      <p:grpSpPr>
+        <a:xfrm>
+          <a:off x="0" y="0"/>
+          <a:ext cx="0" cy="0"/>
+          <a:chOff x="0" y="0"/>
+          <a:chExt cx="0" cy="0"/>
+        </a:xfrm>
+      </p:grpSpPr>
+      <p:sp>
+        <p:nvSpPr>
+          <p:cNvPr id="5" name="內容版面配置區 4">
+            <a:extLst>
+              <a:ext uri="{FF2B5EF4-FFF2-40B4-BE49-F238E27FC236}">
+                <a16:creationId xmlns:a16="http://schemas.microsoft.com/office/drawing/2014/main" id="{EE77592B-EE8B-614D-4160-CDFC7BCE80DB}"/>
+              </a:ext>
+            </a:extLst>
+          </p:cNvPr>
+          <p:cNvSpPr>
+            <a:spLocks noGrp="1"/>
+          </p:cNvSpPr>
+          <p:nvPr>
+            <p:ph idx="1"/>
+          </p:nvPr>
+        </p:nvSpPr>
+        <p:spPr>
+          <a:xfrm>
+            <a:off x="0" y="1563639"/>
+            <a:ext cx="9144000" cy="1803647"/>
+          </a:xfrm>
+        </p:spPr>
+        <p:txBody>
+          <a:bodyPr anchor="ctr">
+            <a:normAutofit/>
+          </a:bodyPr>
+          <a:lstStyle/>
+          <a:p>
+            <a:pPr algn="ctr">
+              <a:buNone/>
+            </a:pPr>
+            <a:r>
+              <a:rPr lang="zh-TW" altLang="en-US" sz="4800" b="1" dirty="0">
+                <a:solidFill>
+                  <a:srgbClr val="000066"/>
+                </a:solidFill>
+                <a:latin typeface="微軟正黑體" pitchFamily="34" charset="-120"/>
+                <a:ea typeface="微軟正黑體" pitchFamily="34" charset="-120"/>
+              </a:rPr>
+              <a:t>天地都會 </a:t>
+            </a:r>
+            <a:r>
+              <a:rPr lang="zh-TW" altLang="en-US" sz="4800" b="1" dirty="0" smtClean="0">
+                <a:solidFill>
+                  <a:srgbClr val="000066"/>
+                </a:solidFill>
+                <a:latin typeface="微軟正黑體" pitchFamily="34" charset="-120"/>
+                <a:ea typeface="微軟正黑體" pitchFamily="34" charset="-120"/>
+              </a:rPr>
+              <a:t> 漸</a:t>
+            </a:r>
+            <a:r>
+              <a:rPr lang="zh-TW" altLang="en-US" sz="4800" b="1" dirty="0">
+                <a:solidFill>
+                  <a:srgbClr val="000066"/>
+                </a:solidFill>
+                <a:latin typeface="微軟正黑體" pitchFamily="34" charset="-120"/>
+                <a:ea typeface="微軟正黑體" pitchFamily="34" charset="-120"/>
+              </a:rPr>
+              <a:t>漸廢去 </a:t>
+            </a:r>
+            <a:endParaRPr lang="en-US" altLang="zh-TW" sz="4800" b="1" dirty="0">
               <a:solidFill>
                 <a:srgbClr val="000066"/>
               </a:solidFill>
@@ -3154,32 +3250,16 @@
               <a:buNone/>
             </a:pPr>
             <a:r>
-              <a:rPr lang="zh-TW" altLang="en-US" sz="4800" b="1" dirty="0" smtClean="0">
+              <a:rPr lang="zh-TW" altLang="en-US" sz="4800" b="1" dirty="0">
                 <a:solidFill>
                   <a:srgbClr val="000066"/>
                 </a:solidFill>
                 <a:latin typeface="微軟正黑體" pitchFamily="34" charset="-120"/>
                 <a:ea typeface="微軟正黑體" pitchFamily="34" charset="-120"/>
               </a:rPr>
-              <a:t>我罪已得赦免</a:t>
-            </a:r>
-            <a:endParaRPr lang="en-US" altLang="zh-TW" sz="4800" dirty="0" smtClean="0"/>
-          </a:p>
-          <a:p>
-            <a:pPr algn="ctr">
-              <a:buNone/>
-            </a:pPr>
-            <a:r>
-              <a:rPr lang="zh-TW" altLang="en-US" sz="4800" b="1" dirty="0" smtClean="0">
-                <a:solidFill>
-                  <a:srgbClr val="000066"/>
-                </a:solidFill>
-                <a:latin typeface="微軟正黑體" pitchFamily="34" charset="-120"/>
-                <a:ea typeface="微軟正黑體" pitchFamily="34" charset="-120"/>
-              </a:rPr>
-              <a:t>前我失喪 今被尋回 </a:t>
-            </a:r>
-            <a:endParaRPr lang="en-US" altLang="zh-TW" sz="4800" b="1" dirty="0" smtClean="0">
+              <a:t>但我主永長存</a:t>
+            </a:r>
+            <a:endParaRPr lang="en-US" altLang="zh-TW" sz="4800" b="1" dirty="0">
               <a:solidFill>
                 <a:srgbClr val="000066"/>
               </a:solidFill>
@@ -3187,27 +3267,597 @@
               <a:ea typeface="微軟正黑體" pitchFamily="34" charset="-120"/>
             </a:endParaRPr>
           </a:p>
-          <a:p>
-            <a:pPr algn="ctr">
-              <a:buNone/>
-            </a:pPr>
-            <a:r>
-              <a:rPr lang="zh-TW" altLang="en-US" sz="4800" b="1" dirty="0" smtClean="0">
-                <a:solidFill>
-                  <a:srgbClr val="000066"/>
-                </a:solidFill>
-                <a:latin typeface="微軟正黑體" pitchFamily="34" charset="-120"/>
-                <a:ea typeface="微軟正黑體" pitchFamily="34" charset="-120"/>
-              </a:rPr>
-              <a:t>瞎眼今得看見</a:t>
-            </a:r>
+        </p:txBody>
+      </p:sp>
+      <p:sp>
+        <p:nvSpPr>
+          <p:cNvPr id="3" name="TextBox 2">
+            <a:extLst>
+              <a:ext uri="{FF2B5EF4-FFF2-40B4-BE49-F238E27FC236}">
+                <a16:creationId xmlns:a16="http://schemas.microsoft.com/office/drawing/2014/main" id="{FA175DD0-F211-14DE-420F-4A50F79B6BD2}"/>
+              </a:ext>
+            </a:extLst>
+          </p:cNvPr>
+          <p:cNvSpPr txBox="1"/>
+          <p:nvPr/>
+        </p:nvSpPr>
+        <p:spPr>
+          <a:xfrm>
+            <a:off x="0" y="3867895"/>
+            <a:ext cx="9144000" cy="461665"/>
+          </a:xfrm>
+          <a:prstGeom prst="rect">
+            <a:avLst/>
+          </a:prstGeom>
+          <a:noFill/>
+        </p:spPr>
+        <p:txBody>
+          <a:bodyPr wrap="square" rtlCol="0">
+            <a:spAutoFit/>
+          </a:bodyPr>
+          <a:lstStyle/>
+          <a:p>
+            <a:pPr algn="ctr"/>
+            <a:r>
+              <a:rPr lang="en-US" sz="2400" b="1" dirty="0">
+                <a:solidFill>
+                  <a:srgbClr val="000066"/>
+                </a:solidFill>
+                <a:latin typeface="+mj-lt"/>
+                <a:ea typeface="Microsoft JhengHei" panose="020B0604030504040204" pitchFamily="34" charset="-120"/>
+              </a:rPr>
+              <a:t>( </a:t>
+            </a:r>
+            <a:r>
+              <a:rPr lang="en-US" altLang="zh-CN" sz="2400" b="1" dirty="0" smtClean="0">
+                <a:solidFill>
+                  <a:srgbClr val="000066"/>
+                </a:solidFill>
+                <a:latin typeface="+mj-lt"/>
+                <a:ea typeface="Microsoft JhengHei" panose="020B0604030504040204" pitchFamily="34" charset="-120"/>
+              </a:rPr>
+              <a:t>4 / 4</a:t>
+            </a:r>
+            <a:r>
+              <a:rPr lang="en-US" sz="2400" b="1" dirty="0" smtClean="0">
+                <a:solidFill>
+                  <a:srgbClr val="000066"/>
+                </a:solidFill>
+                <a:latin typeface="+mj-lt"/>
+                <a:ea typeface="Microsoft JhengHei" panose="020B0604030504040204" pitchFamily="34" charset="-120"/>
+              </a:rPr>
+              <a:t> </a:t>
+            </a:r>
+            <a:r>
+              <a:rPr lang="en-US" sz="2400" b="1" dirty="0">
+                <a:solidFill>
+                  <a:srgbClr val="000066"/>
+                </a:solidFill>
+                <a:latin typeface="+mj-lt"/>
+                <a:ea typeface="Microsoft JhengHei" panose="020B0604030504040204" pitchFamily="34" charset="-120"/>
+              </a:rPr>
+              <a:t>)</a:t>
+            </a:r>
+            <a:endParaRPr lang="vi-VN" sz="2400" b="1" dirty="0">
+              <a:solidFill>
+                <a:srgbClr val="000066"/>
+              </a:solidFill>
+              <a:latin typeface="+mj-lt"/>
+              <a:ea typeface="Microsoft JhengHei" panose="020B0604030504040204" pitchFamily="34" charset="-120"/>
+            </a:endParaRPr>
           </a:p>
         </p:txBody>
       </p:sp>
     </p:spTree>
     <p:extLst>
       <p:ext uri="{BB962C8B-B14F-4D97-AF65-F5344CB8AC3E}">
-        <p14:creationId xmlns:p14="http://schemas.microsoft.com/office/powerpoint/2010/main" val="3077437805"/>
+        <p14:creationId xmlns:p14="http://schemas.microsoft.com/office/powerpoint/2010/main" val="1657404665"/>
+      </p:ext>
+    </p:extLst>
+  </p:cSld>
+  <p:clrMapOvr>
+    <a:masterClrMapping/>
+  </p:clrMapOvr>
+</p:sld>
+</file>
+
+<file path=ppt/slides/slide11.xml><?xml version="1.0" encoding="utf-8"?>
+<p:sld xmlns:a="http://schemas.openxmlformats.org/drawingml/2006/main" xmlns:r="http://schemas.openxmlformats.org/officeDocument/2006/relationships" xmlns:p="http://schemas.openxmlformats.org/presentationml/2006/main">
+  <p:cSld>
+    <p:spTree>
+      <p:nvGrpSpPr>
+        <p:cNvPr id="1" name="">
+          <a:extLst>
+            <a:ext uri="{FF2B5EF4-FFF2-40B4-BE49-F238E27FC236}">
+              <a16:creationId xmlns:a16="http://schemas.microsoft.com/office/drawing/2014/main" id="{499F6A04-361B-D03C-72FC-83746A3861FC}"/>
+            </a:ext>
+          </a:extLst>
+        </p:cNvPr>
+        <p:cNvGrpSpPr/>
+        <p:nvPr/>
+      </p:nvGrpSpPr>
+      <p:grpSpPr>
+        <a:xfrm>
+          <a:off x="0" y="0"/>
+          <a:ext cx="0" cy="0"/>
+          <a:chOff x="0" y="0"/>
+          <a:chExt cx="0" cy="0"/>
+        </a:xfrm>
+      </p:grpSpPr>
+      <p:sp>
+        <p:nvSpPr>
+          <p:cNvPr id="5" name="內容版面配置區 4">
+            <a:extLst>
+              <a:ext uri="{FF2B5EF4-FFF2-40B4-BE49-F238E27FC236}">
+                <a16:creationId xmlns:a16="http://schemas.microsoft.com/office/drawing/2014/main" id="{EE77592B-EE8B-614D-4160-CDFC7BCE80DB}"/>
+              </a:ext>
+            </a:extLst>
+          </p:cNvPr>
+          <p:cNvSpPr>
+            <a:spLocks noGrp="1"/>
+          </p:cNvSpPr>
+          <p:nvPr>
+            <p:ph idx="1"/>
+          </p:nvPr>
+        </p:nvSpPr>
+        <p:spPr>
+          <a:xfrm>
+            <a:off x="0" y="1563639"/>
+            <a:ext cx="9144000" cy="1803647"/>
+          </a:xfrm>
+        </p:spPr>
+        <p:txBody>
+          <a:bodyPr anchor="ctr">
+            <a:normAutofit/>
+          </a:bodyPr>
+          <a:lstStyle/>
+          <a:p>
+            <a:pPr algn="ctr">
+              <a:buNone/>
+            </a:pPr>
+            <a:r>
+              <a:rPr lang="zh-TW" altLang="en-US" sz="4800" b="1" dirty="0">
+                <a:solidFill>
+                  <a:srgbClr val="000066"/>
+                </a:solidFill>
+                <a:latin typeface="微軟正黑體" pitchFamily="34" charset="-120"/>
+                <a:ea typeface="微軟正黑體" pitchFamily="34" charset="-120"/>
+              </a:rPr>
+              <a:t>我的生命 </a:t>
+            </a:r>
+            <a:r>
+              <a:rPr lang="zh-TW" altLang="en-US" sz="4800" b="1" dirty="0" smtClean="0">
+                <a:solidFill>
+                  <a:srgbClr val="000066"/>
+                </a:solidFill>
+                <a:latin typeface="微軟正黑體" pitchFamily="34" charset="-120"/>
+                <a:ea typeface="微軟正黑體" pitchFamily="34" charset="-120"/>
+              </a:rPr>
+              <a:t> 有</a:t>
+            </a:r>
+            <a:r>
+              <a:rPr lang="zh-TW" altLang="en-US" sz="4800" b="1" dirty="0">
+                <a:solidFill>
+                  <a:srgbClr val="000066"/>
+                </a:solidFill>
+                <a:latin typeface="微軟正黑體" pitchFamily="34" charset="-120"/>
+                <a:ea typeface="微軟正黑體" pitchFamily="34" charset="-120"/>
+              </a:rPr>
+              <a:t>主看顧 </a:t>
+            </a:r>
+            <a:endParaRPr lang="en-US" altLang="zh-TW" sz="4800" b="1" dirty="0">
+              <a:solidFill>
+                <a:srgbClr val="000066"/>
+              </a:solidFill>
+              <a:latin typeface="微軟正黑體" pitchFamily="34" charset="-120"/>
+              <a:ea typeface="微軟正黑體" pitchFamily="34" charset="-120"/>
+            </a:endParaRPr>
+          </a:p>
+          <a:p>
+            <a:pPr algn="ctr">
+              <a:buNone/>
+            </a:pPr>
+            <a:r>
+              <a:rPr lang="zh-TW" altLang="en-US" sz="4800" b="1" dirty="0">
+                <a:solidFill>
+                  <a:srgbClr val="000066"/>
+                </a:solidFill>
+                <a:latin typeface="微軟正黑體" pitchFamily="34" charset="-120"/>
+                <a:ea typeface="微軟正黑體" pitchFamily="34" charset="-120"/>
+              </a:rPr>
+              <a:t>我永遠屬於祢</a:t>
+            </a:r>
+            <a:endParaRPr lang="en-US" altLang="zh-TW" sz="4800" b="1" dirty="0">
+              <a:solidFill>
+                <a:srgbClr val="000066"/>
+              </a:solidFill>
+              <a:latin typeface="微軟正黑體" pitchFamily="34" charset="-120"/>
+              <a:ea typeface="微軟正黑體" pitchFamily="34" charset="-120"/>
+            </a:endParaRPr>
+          </a:p>
+        </p:txBody>
+      </p:sp>
+      <p:sp>
+        <p:nvSpPr>
+          <p:cNvPr id="3" name="TextBox 2">
+            <a:extLst>
+              <a:ext uri="{FF2B5EF4-FFF2-40B4-BE49-F238E27FC236}">
+                <a16:creationId xmlns:a16="http://schemas.microsoft.com/office/drawing/2014/main" id="{FA175DD0-F211-14DE-420F-4A50F79B6BD2}"/>
+              </a:ext>
+            </a:extLst>
+          </p:cNvPr>
+          <p:cNvSpPr txBox="1"/>
+          <p:nvPr/>
+        </p:nvSpPr>
+        <p:spPr>
+          <a:xfrm>
+            <a:off x="0" y="3867895"/>
+            <a:ext cx="9144000" cy="461665"/>
+          </a:xfrm>
+          <a:prstGeom prst="rect">
+            <a:avLst/>
+          </a:prstGeom>
+          <a:noFill/>
+        </p:spPr>
+        <p:txBody>
+          <a:bodyPr wrap="square" rtlCol="0">
+            <a:spAutoFit/>
+          </a:bodyPr>
+          <a:lstStyle/>
+          <a:p>
+            <a:pPr algn="ctr"/>
+            <a:r>
+              <a:rPr lang="en-US" sz="2400" b="1" dirty="0">
+                <a:solidFill>
+                  <a:srgbClr val="000066"/>
+                </a:solidFill>
+                <a:latin typeface="+mj-lt"/>
+                <a:ea typeface="Microsoft JhengHei" panose="020B0604030504040204" pitchFamily="34" charset="-120"/>
+              </a:rPr>
+              <a:t>( </a:t>
+            </a:r>
+            <a:r>
+              <a:rPr lang="en-US" altLang="zh-CN" sz="2400" b="1" dirty="0" smtClean="0">
+                <a:solidFill>
+                  <a:srgbClr val="000066"/>
+                </a:solidFill>
+                <a:latin typeface="+mj-lt"/>
+                <a:ea typeface="Microsoft JhengHei" panose="020B0604030504040204" pitchFamily="34" charset="-120"/>
+              </a:rPr>
+              <a:t>4 / 4</a:t>
+            </a:r>
+            <a:r>
+              <a:rPr lang="en-US" sz="2400" b="1" dirty="0" smtClean="0">
+                <a:solidFill>
+                  <a:srgbClr val="000066"/>
+                </a:solidFill>
+                <a:latin typeface="+mj-lt"/>
+                <a:ea typeface="Microsoft JhengHei" panose="020B0604030504040204" pitchFamily="34" charset="-120"/>
+              </a:rPr>
+              <a:t> </a:t>
+            </a:r>
+            <a:r>
+              <a:rPr lang="en-US" sz="2400" b="1" dirty="0">
+                <a:solidFill>
+                  <a:srgbClr val="000066"/>
+                </a:solidFill>
+                <a:latin typeface="+mj-lt"/>
+                <a:ea typeface="Microsoft JhengHei" panose="020B0604030504040204" pitchFamily="34" charset="-120"/>
+              </a:rPr>
+              <a:t>)</a:t>
+            </a:r>
+            <a:endParaRPr lang="vi-VN" sz="2400" b="1" dirty="0">
+              <a:solidFill>
+                <a:srgbClr val="000066"/>
+              </a:solidFill>
+              <a:latin typeface="+mj-lt"/>
+              <a:ea typeface="Microsoft JhengHei" panose="020B0604030504040204" pitchFamily="34" charset="-120"/>
+            </a:endParaRPr>
+          </a:p>
+        </p:txBody>
+      </p:sp>
+    </p:spTree>
+    <p:extLst>
+      <p:ext uri="{BB962C8B-B14F-4D97-AF65-F5344CB8AC3E}">
+        <p14:creationId xmlns:p14="http://schemas.microsoft.com/office/powerpoint/2010/main" val="2544162177"/>
+      </p:ext>
+    </p:extLst>
+  </p:cSld>
+  <p:clrMapOvr>
+    <a:masterClrMapping/>
+  </p:clrMapOvr>
+</p:sld>
+</file>
+
+<file path=ppt/slides/slide12.xml><?xml version="1.0" encoding="utf-8"?>
+<p:sld xmlns:a="http://schemas.openxmlformats.org/drawingml/2006/main" xmlns:r="http://schemas.openxmlformats.org/officeDocument/2006/relationships" xmlns:p="http://schemas.openxmlformats.org/presentationml/2006/main">
+  <p:cSld>
+    <p:spTree>
+      <p:nvGrpSpPr>
+        <p:cNvPr id="1" name="">
+          <a:extLst>
+            <a:ext uri="{FF2B5EF4-FFF2-40B4-BE49-F238E27FC236}">
+              <a16:creationId xmlns:a16="http://schemas.microsoft.com/office/drawing/2014/main" id="{499F6A04-361B-D03C-72FC-83746A3861FC}"/>
+            </a:ext>
+          </a:extLst>
+        </p:cNvPr>
+        <p:cNvGrpSpPr/>
+        <p:nvPr/>
+      </p:nvGrpSpPr>
+      <p:grpSpPr>
+        <a:xfrm>
+          <a:off x="0" y="0"/>
+          <a:ext cx="0" cy="0"/>
+          <a:chOff x="0" y="0"/>
+          <a:chExt cx="0" cy="0"/>
+        </a:xfrm>
+      </p:grpSpPr>
+      <p:sp>
+        <p:nvSpPr>
+          <p:cNvPr id="5" name="內容版面配置區 4">
+            <a:extLst>
+              <a:ext uri="{FF2B5EF4-FFF2-40B4-BE49-F238E27FC236}">
+                <a16:creationId xmlns:a16="http://schemas.microsoft.com/office/drawing/2014/main" id="{EE77592B-EE8B-614D-4160-CDFC7BCE80DB}"/>
+              </a:ext>
+            </a:extLst>
+          </p:cNvPr>
+          <p:cNvSpPr>
+            <a:spLocks noGrp="1"/>
+          </p:cNvSpPr>
+          <p:nvPr>
+            <p:ph idx="1"/>
+          </p:nvPr>
+        </p:nvSpPr>
+        <p:spPr>
+          <a:xfrm>
+            <a:off x="0" y="1563639"/>
+            <a:ext cx="9144000" cy="1803647"/>
+          </a:xfrm>
+        </p:spPr>
+        <p:txBody>
+          <a:bodyPr anchor="ctr">
+            <a:normAutofit/>
+          </a:bodyPr>
+          <a:lstStyle/>
+          <a:p>
+            <a:pPr algn="ctr">
+              <a:buNone/>
+            </a:pPr>
+            <a:r>
+              <a:rPr lang="zh-TW" altLang="en-US" sz="4800" b="1" dirty="0">
+                <a:solidFill>
+                  <a:srgbClr val="000066"/>
+                </a:solidFill>
+                <a:latin typeface="微軟正黑體" pitchFamily="34" charset="-120"/>
+                <a:ea typeface="微軟正黑體" pitchFamily="34" charset="-120"/>
+              </a:rPr>
+              <a:t>不再有捆綁 </a:t>
+            </a:r>
+            <a:r>
+              <a:rPr lang="zh-TW" altLang="en-US" sz="4800" b="1" dirty="0" smtClean="0">
+                <a:solidFill>
+                  <a:srgbClr val="000066"/>
+                </a:solidFill>
+                <a:latin typeface="微軟正黑體" pitchFamily="34" charset="-120"/>
+                <a:ea typeface="微軟正黑體" pitchFamily="34" charset="-120"/>
+              </a:rPr>
+              <a:t> 我</a:t>
+            </a:r>
+            <a:r>
+              <a:rPr lang="zh-TW" altLang="en-US" sz="4800" b="1" dirty="0">
+                <a:solidFill>
+                  <a:srgbClr val="000066"/>
+                </a:solidFill>
+                <a:latin typeface="微軟正黑體" pitchFamily="34" charset="-120"/>
+                <a:ea typeface="微軟正黑體" pitchFamily="34" charset="-120"/>
+              </a:rPr>
+              <a:t>已得釋放 </a:t>
+            </a:r>
+            <a:endParaRPr lang="en-US" altLang="zh-TW" sz="4800" b="1" dirty="0">
+              <a:solidFill>
+                <a:srgbClr val="000066"/>
+              </a:solidFill>
+              <a:latin typeface="微軟正黑體" pitchFamily="34" charset="-120"/>
+              <a:ea typeface="微軟正黑體" pitchFamily="34" charset="-120"/>
+            </a:endParaRPr>
+          </a:p>
+          <a:p>
+            <a:pPr algn="ctr">
+              <a:buNone/>
+            </a:pPr>
+            <a:r>
+              <a:rPr lang="zh-TW" altLang="en-US" sz="4800" b="1" dirty="0">
+                <a:solidFill>
+                  <a:srgbClr val="000066"/>
+                </a:solidFill>
+                <a:latin typeface="微軟正黑體" pitchFamily="34" charset="-120"/>
+                <a:ea typeface="微軟正黑體" pitchFamily="34" charset="-120"/>
+              </a:rPr>
+              <a:t>我救主耶穌 </a:t>
+            </a:r>
+            <a:r>
+              <a:rPr lang="zh-TW" altLang="en-US" sz="4800" b="1" dirty="0" smtClean="0">
+                <a:solidFill>
+                  <a:srgbClr val="000066"/>
+                </a:solidFill>
+                <a:latin typeface="微軟正黑體" pitchFamily="34" charset="-120"/>
+                <a:ea typeface="微軟正黑體" pitchFamily="34" charset="-120"/>
+              </a:rPr>
+              <a:t> 已</a:t>
+            </a:r>
+            <a:r>
+              <a:rPr lang="zh-TW" altLang="en-US" sz="4800" b="1" dirty="0">
+                <a:solidFill>
+                  <a:srgbClr val="000066"/>
+                </a:solidFill>
+                <a:latin typeface="微軟正黑體" pitchFamily="34" charset="-120"/>
+                <a:ea typeface="微軟正黑體" pitchFamily="34" charset="-120"/>
+              </a:rPr>
+              <a:t>付代價</a:t>
+            </a:r>
+            <a:endParaRPr lang="en-US" altLang="zh-TW" sz="4800" b="1" dirty="0">
+              <a:solidFill>
+                <a:srgbClr val="000066"/>
+              </a:solidFill>
+              <a:latin typeface="微軟正黑體" pitchFamily="34" charset="-120"/>
+              <a:ea typeface="微軟正黑體" pitchFamily="34" charset="-120"/>
+            </a:endParaRPr>
+          </a:p>
+        </p:txBody>
+      </p:sp>
+    </p:spTree>
+    <p:extLst>
+      <p:ext uri="{BB962C8B-B14F-4D97-AF65-F5344CB8AC3E}">
+        <p14:creationId xmlns:p14="http://schemas.microsoft.com/office/powerpoint/2010/main" val="1499101283"/>
+      </p:ext>
+    </p:extLst>
+  </p:cSld>
+  <p:clrMapOvr>
+    <a:masterClrMapping/>
+  </p:clrMapOvr>
+</p:sld>
+</file>
+
+<file path=ppt/slides/slide13.xml><?xml version="1.0" encoding="utf-8"?>
+<p:sld xmlns:a="http://schemas.openxmlformats.org/drawingml/2006/main" xmlns:r="http://schemas.openxmlformats.org/officeDocument/2006/relationships" xmlns:p="http://schemas.openxmlformats.org/presentationml/2006/main">
+  <p:cSld>
+    <p:spTree>
+      <p:nvGrpSpPr>
+        <p:cNvPr id="1" name="">
+          <a:extLst>
+            <a:ext uri="{FF2B5EF4-FFF2-40B4-BE49-F238E27FC236}">
+              <a16:creationId xmlns:a16="http://schemas.microsoft.com/office/drawing/2014/main" id="{499F6A04-361B-D03C-72FC-83746A3861FC}"/>
+            </a:ext>
+          </a:extLst>
+        </p:cNvPr>
+        <p:cNvGrpSpPr/>
+        <p:nvPr/>
+      </p:nvGrpSpPr>
+      <p:grpSpPr>
+        <a:xfrm>
+          <a:off x="0" y="0"/>
+          <a:ext cx="0" cy="0"/>
+          <a:chOff x="0" y="0"/>
+          <a:chExt cx="0" cy="0"/>
+        </a:xfrm>
+      </p:grpSpPr>
+      <p:sp>
+        <p:nvSpPr>
+          <p:cNvPr id="5" name="內容版面配置區 4">
+            <a:extLst>
+              <a:ext uri="{FF2B5EF4-FFF2-40B4-BE49-F238E27FC236}">
+                <a16:creationId xmlns:a16="http://schemas.microsoft.com/office/drawing/2014/main" id="{EE77592B-EE8B-614D-4160-CDFC7BCE80DB}"/>
+              </a:ext>
+            </a:extLst>
+          </p:cNvPr>
+          <p:cNvSpPr>
+            <a:spLocks noGrp="1"/>
+          </p:cNvSpPr>
+          <p:nvPr>
+            <p:ph idx="1"/>
+          </p:nvPr>
+        </p:nvSpPr>
+        <p:spPr>
+          <a:xfrm>
+            <a:off x="0" y="1563639"/>
+            <a:ext cx="9144000" cy="1803647"/>
+          </a:xfrm>
+        </p:spPr>
+        <p:txBody>
+          <a:bodyPr anchor="ctr">
+            <a:normAutofit/>
+          </a:bodyPr>
+          <a:lstStyle/>
+          <a:p>
+            <a:pPr algn="ctr">
+              <a:buNone/>
+            </a:pPr>
+            <a:r>
+              <a:rPr lang="zh-TW" altLang="en-US" sz="4800" b="1" dirty="0">
+                <a:solidFill>
+                  <a:srgbClr val="000066"/>
+                </a:solidFill>
+                <a:latin typeface="微軟正黑體" pitchFamily="34" charset="-120"/>
+                <a:ea typeface="微軟正黑體" pitchFamily="34" charset="-120"/>
+              </a:rPr>
+              <a:t>豐富恩典 </a:t>
+            </a:r>
+            <a:r>
+              <a:rPr lang="zh-TW" altLang="en-US" sz="4800" b="1" dirty="0" smtClean="0">
+                <a:solidFill>
+                  <a:srgbClr val="000066"/>
+                </a:solidFill>
+                <a:latin typeface="微軟正黑體" pitchFamily="34" charset="-120"/>
+                <a:ea typeface="微軟正黑體" pitchFamily="34" charset="-120"/>
+              </a:rPr>
+              <a:t> 今</a:t>
+            </a:r>
+            <a:r>
+              <a:rPr lang="zh-TW" altLang="en-US" sz="4800" b="1" dirty="0">
+                <a:solidFill>
+                  <a:srgbClr val="000066"/>
+                </a:solidFill>
+                <a:latin typeface="微軟正黑體" pitchFamily="34" charset="-120"/>
+                <a:ea typeface="微軟正黑體" pitchFamily="34" charset="-120"/>
+              </a:rPr>
+              <a:t>充滿我 </a:t>
+            </a:r>
+            <a:endParaRPr lang="en-US" altLang="zh-TW" sz="4800" b="1" dirty="0">
+              <a:solidFill>
+                <a:srgbClr val="000066"/>
+              </a:solidFill>
+              <a:latin typeface="微軟正黑體" pitchFamily="34" charset="-120"/>
+              <a:ea typeface="微軟正黑體" pitchFamily="34" charset="-120"/>
+            </a:endParaRPr>
+          </a:p>
+          <a:p>
+            <a:pPr algn="ctr">
+              <a:buNone/>
+            </a:pPr>
+            <a:r>
+              <a:rPr lang="zh-TW" altLang="en-US" sz="4800" b="1" dirty="0">
+                <a:solidFill>
+                  <a:srgbClr val="000066"/>
+                </a:solidFill>
+                <a:latin typeface="微軟正黑體" pitchFamily="34" charset="-120"/>
+                <a:ea typeface="微軟正黑體" pitchFamily="34" charset="-120"/>
+              </a:rPr>
+              <a:t>永恆的愛 </a:t>
+            </a:r>
+            <a:r>
+              <a:rPr lang="zh-TW" altLang="en-US" sz="4800" b="1" dirty="0" smtClean="0">
+                <a:solidFill>
+                  <a:srgbClr val="000066"/>
+                </a:solidFill>
+                <a:latin typeface="微軟正黑體" pitchFamily="34" charset="-120"/>
+                <a:ea typeface="微軟正黑體" pitchFamily="34" charset="-120"/>
+              </a:rPr>
+              <a:t> 奇異</a:t>
+            </a:r>
+            <a:r>
+              <a:rPr lang="zh-TW" altLang="en-US" sz="4800" b="1" dirty="0">
+                <a:solidFill>
+                  <a:srgbClr val="000066"/>
+                </a:solidFill>
+                <a:latin typeface="微軟正黑體" pitchFamily="34" charset="-120"/>
+                <a:ea typeface="微軟正黑體" pitchFamily="34" charset="-120"/>
+              </a:rPr>
+              <a:t>恩典</a:t>
+            </a:r>
+            <a:endParaRPr lang="zh-TW" altLang="en-US" sz="4800" b="1" dirty="0">
+              <a:solidFill>
+                <a:srgbClr val="000066"/>
+              </a:solidFill>
+              <a:latin typeface="微軟正黑體" pitchFamily="34" charset="-120"/>
+              <a:ea typeface="微軟正黑體" pitchFamily="34" charset="-120"/>
+            </a:endParaRPr>
+          </a:p>
+        </p:txBody>
+      </p:sp>
+    </p:spTree>
+    <p:extLst>
+      <p:ext uri="{BB962C8B-B14F-4D97-AF65-F5344CB8AC3E}">
+        <p14:creationId xmlns:p14="http://schemas.microsoft.com/office/powerpoint/2010/main" val="174973379"/>
       </p:ext>
     </p:extLst>
   </p:cSld>
@@ -3222,7 +3872,13 @@
   <p:cSld>
     <p:spTree>
       <p:nvGrpSpPr>
-        <p:cNvPr id="1" name=""/>
+        <p:cNvPr id="1" name="">
+          <a:extLst>
+            <a:ext uri="{FF2B5EF4-FFF2-40B4-BE49-F238E27FC236}">
+              <a16:creationId xmlns:a16="http://schemas.microsoft.com/office/drawing/2014/main" id="{499F6A04-361B-D03C-72FC-83746A3861FC}"/>
+            </a:ext>
+          </a:extLst>
+        </p:cNvPr>
         <p:cNvGrpSpPr/>
         <p:nvPr/>
       </p:nvGrpSpPr>
@@ -3236,186 +3892,79 @@
       </p:grpSpPr>
       <p:sp>
         <p:nvSpPr>
-          <p:cNvPr id="2" name="Title 1"/>
-          <p:cNvSpPr>
-            <a:spLocks noGrp="1"/>
-          </p:cNvSpPr>
-          <p:nvPr>
-            <p:ph type="title"/>
-          </p:nvPr>
-        </p:nvSpPr>
-        <p:spPr/>
-        <p:txBody>
-          <a:bodyPr>
+          <p:cNvPr id="5" name="內容版面配置區 4">
+            <a:extLst>
+              <a:ext uri="{FF2B5EF4-FFF2-40B4-BE49-F238E27FC236}">
+                <a16:creationId xmlns:a16="http://schemas.microsoft.com/office/drawing/2014/main" id="{EE77592B-EE8B-614D-4160-CDFC7BCE80DB}"/>
+              </a:ext>
+            </a:extLst>
+          </p:cNvPr>
+          <p:cNvSpPr>
+            <a:spLocks noGrp="1"/>
+          </p:cNvSpPr>
+          <p:nvPr>
+            <p:ph idx="1"/>
+          </p:nvPr>
+        </p:nvSpPr>
+        <p:spPr>
+          <a:xfrm>
+            <a:off x="0" y="1563639"/>
+            <a:ext cx="9144000" cy="1803647"/>
+          </a:xfrm>
+        </p:spPr>
+        <p:txBody>
+          <a:bodyPr anchor="ctr">
             <a:normAutofit/>
           </a:bodyPr>
           <a:lstStyle/>
           <a:p>
-            <a:r>
-              <a:rPr lang="zh-TW" altLang="en-US" sz="4000" b="1" dirty="0">
+            <a:pPr algn="ctr">
+              <a:buNone/>
+            </a:pPr>
+            <a:r>
+              <a:rPr lang="zh-TW" altLang="en-US" sz="4800" b="1" dirty="0">
                 <a:solidFill>
                   <a:srgbClr val="000066"/>
                 </a:solidFill>
                 <a:latin typeface="微軟正黑體" pitchFamily="34" charset="-120"/>
                 <a:ea typeface="微軟正黑體" pitchFamily="34" charset="-120"/>
               </a:rPr>
-              <a:t>奇異恩典</a:t>
-            </a:r>
-            <a:r>
-              <a:rPr lang="zh-CN" altLang="en-US" sz="4000" b="1" dirty="0">
+              <a:t>奇異恩典 </a:t>
+            </a:r>
+            <a:r>
+              <a:rPr lang="zh-TW" altLang="en-US" sz="4800" b="1" dirty="0" smtClean="0">
                 <a:solidFill>
                   <a:srgbClr val="000066"/>
                 </a:solidFill>
                 <a:latin typeface="微軟正黑體" pitchFamily="34" charset="-120"/>
                 <a:ea typeface="微軟正黑體" pitchFamily="34" charset="-120"/>
               </a:rPr>
-              <a:t>（</a:t>
-            </a:r>
-            <a:r>
-              <a:rPr lang="zh-TW" altLang="en-US" sz="4000" b="1" dirty="0">
+              <a:t> 何</a:t>
+            </a:r>
+            <a:r>
+              <a:rPr lang="zh-TW" altLang="en-US" sz="4800" b="1" dirty="0">
                 <a:solidFill>
                   <a:srgbClr val="000066"/>
                 </a:solidFill>
                 <a:latin typeface="微軟正黑體" pitchFamily="34" charset="-120"/>
                 <a:ea typeface="微軟正黑體" pitchFamily="34" charset="-120"/>
               </a:rPr>
-              <a:t>不再綑綁</a:t>
-            </a:r>
-            <a:r>
-              <a:rPr lang="zh-CN" altLang="en-US" sz="4000" b="1" dirty="0">
+              <a:t>等甘甜 </a:t>
+            </a:r>
+          </a:p>
+          <a:p>
+            <a:pPr algn="ctr">
+              <a:buNone/>
+            </a:pPr>
+            <a:r>
+              <a:rPr lang="zh-TW" altLang="en-US" sz="4800" b="1" dirty="0">
                 <a:solidFill>
                   <a:srgbClr val="000066"/>
                 </a:solidFill>
                 <a:latin typeface="微軟正黑體" pitchFamily="34" charset="-120"/>
                 <a:ea typeface="微軟正黑體" pitchFamily="34" charset="-120"/>
               </a:rPr>
-              <a:t>）</a:t>
-            </a:r>
-            <a:endParaRPr lang="en-US" sz="4000" b="1" dirty="0">
-              <a:solidFill>
-                <a:srgbClr val="000066"/>
-              </a:solidFill>
-              <a:latin typeface="微軟正黑體" pitchFamily="34" charset="-120"/>
-              <a:ea typeface="微軟正黑體" pitchFamily="34" charset="-120"/>
-            </a:endParaRPr>
-          </a:p>
-        </p:txBody>
-      </p:sp>
-      <p:sp>
-        <p:nvSpPr>
-          <p:cNvPr id="3" name="Content Placeholder 2"/>
-          <p:cNvSpPr>
-            <a:spLocks noGrp="1"/>
-          </p:cNvSpPr>
-          <p:nvPr>
-            <p:ph idx="1"/>
-          </p:nvPr>
-        </p:nvSpPr>
-        <p:spPr/>
-        <p:txBody>
-          <a:bodyPr>
-            <a:noAutofit/>
-          </a:bodyPr>
-          <a:lstStyle/>
-          <a:p>
-            <a:pPr algn="ctr">
-              <a:buNone/>
-            </a:pPr>
-            <a:r>
-              <a:rPr lang="zh-CN" altLang="en-US" sz="4800" b="1" dirty="0">
-                <a:solidFill>
-                  <a:srgbClr val="000066"/>
-                </a:solidFill>
-                <a:latin typeface="微軟正黑體" pitchFamily="34" charset="-120"/>
-                <a:ea typeface="微軟正黑體" pitchFamily="34" charset="-120"/>
-              </a:rPr>
-              <a:t>如此恩典 使我敬畏 </a:t>
-            </a:r>
-            <a:endParaRPr lang="en-US" altLang="zh-CN" sz="4800" b="1" dirty="0">
-              <a:solidFill>
-                <a:srgbClr val="000066"/>
-              </a:solidFill>
-              <a:latin typeface="微軟正黑體" pitchFamily="34" charset="-120"/>
-              <a:ea typeface="微軟正黑體" pitchFamily="34" charset="-120"/>
-            </a:endParaRPr>
-          </a:p>
-          <a:p>
-            <a:pPr algn="ctr">
-              <a:buNone/>
-            </a:pPr>
-            <a:r>
-              <a:rPr lang="zh-CN" altLang="en-US" sz="4800" b="1" dirty="0">
-                <a:solidFill>
-                  <a:srgbClr val="000066"/>
-                </a:solidFill>
-                <a:latin typeface="微軟正黑體" pitchFamily="34" charset="-120"/>
-                <a:ea typeface="微軟正黑體" pitchFamily="34" charset="-120"/>
-              </a:rPr>
-              <a:t>使我心得安</a:t>
-            </a:r>
-            <a:r>
-              <a:rPr lang="zh-CN" altLang="en-US" sz="4800" b="1" dirty="0">
-                <a:solidFill>
-                  <a:srgbClr val="000066"/>
-                </a:solidFill>
-                <a:latin typeface="微軟正黑體" pitchFamily="34" charset="-120"/>
-                <a:ea typeface="微軟正黑體" pitchFamily="34" charset="-120"/>
-              </a:rPr>
-              <a:t>慰</a:t>
-            </a:r>
-            <a:endParaRPr lang="en-US" altLang="zh-CN" sz="4800" b="1" dirty="0">
-              <a:solidFill>
-                <a:srgbClr val="000066"/>
-              </a:solidFill>
-              <a:latin typeface="微軟正黑體" pitchFamily="34" charset="-120"/>
-              <a:ea typeface="微軟正黑體" pitchFamily="34" charset="-120"/>
-            </a:endParaRPr>
-          </a:p>
-          <a:p>
-            <a:pPr algn="ctr">
-              <a:buNone/>
-            </a:pPr>
-            <a:r>
-              <a:rPr lang="zh-TW" altLang="en-US" sz="4800" b="1" dirty="0">
-                <a:solidFill>
-                  <a:srgbClr val="000066"/>
-                </a:solidFill>
-                <a:latin typeface="微軟正黑體" pitchFamily="34" charset="-120"/>
-                <a:ea typeface="微軟正黑體" pitchFamily="34" charset="-120"/>
-              </a:rPr>
-              <a:t>初信之時 即蒙恩惠 </a:t>
-            </a:r>
-            <a:endParaRPr lang="en-US" altLang="zh-TW" sz="4800" b="1" dirty="0">
-              <a:solidFill>
-                <a:srgbClr val="000066"/>
-              </a:solidFill>
-              <a:latin typeface="微軟正黑體" pitchFamily="34" charset="-120"/>
-              <a:ea typeface="微軟正黑體" pitchFamily="34" charset="-120"/>
-            </a:endParaRPr>
-          </a:p>
-          <a:p>
-            <a:pPr algn="ctr">
-              <a:buNone/>
-            </a:pPr>
-            <a:r>
-              <a:rPr lang="zh-TW" altLang="en-US" sz="4800" b="1" dirty="0">
-                <a:solidFill>
-                  <a:srgbClr val="000066"/>
-                </a:solidFill>
-                <a:latin typeface="微軟正黑體" pitchFamily="34" charset="-120"/>
-                <a:ea typeface="微軟正黑體" pitchFamily="34" charset="-120"/>
-              </a:rPr>
-              <a:t>真是何等寶</a:t>
-            </a:r>
-            <a:r>
-              <a:rPr lang="zh-TW" altLang="en-US" sz="4800" b="1" dirty="0">
-                <a:solidFill>
-                  <a:srgbClr val="000066"/>
-                </a:solidFill>
-                <a:latin typeface="微軟正黑體" pitchFamily="34" charset="-120"/>
-                <a:ea typeface="微軟正黑體" pitchFamily="34" charset="-120"/>
-              </a:rPr>
-              <a:t>貴</a:t>
+              <a:t>我罪已得赦免</a:t>
             </a:r>
             <a:endParaRPr lang="zh-TW" altLang="en-US" sz="4800" b="1" dirty="0">
               <a:solidFill>
@@ -3427,10 +3976,89 @@
           </a:p>
         </p:txBody>
       </p:sp>
+      <p:sp>
+        <p:nvSpPr>
+          <p:cNvPr id="3" name="TextBox 2">
+            <a:extLst>
+              <a:ext uri="{FF2B5EF4-FFF2-40B4-BE49-F238E27FC236}">
+                <a16:creationId xmlns:a16="http://schemas.microsoft.com/office/drawing/2014/main" id="{FA175DD0-F211-14DE-420F-4A50F79B6BD2}"/>
+              </a:ext>
+            </a:extLst>
+          </p:cNvPr>
+          <p:cNvSpPr txBox="1"/>
+          <p:nvPr/>
+        </p:nvSpPr>
+        <p:spPr>
+          <a:xfrm>
+            <a:off x="0" y="3867895"/>
+            <a:ext cx="9144000" cy="461665"/>
+          </a:xfrm>
+          <a:prstGeom prst="rect">
+            <a:avLst/>
+          </a:prstGeom>
+          <a:noFill/>
+        </p:spPr>
+        <p:txBody>
+          <a:bodyPr wrap="square" rtlCol="0">
+            <a:spAutoFit/>
+          </a:bodyPr>
+          <a:lstStyle/>
+          <a:p>
+            <a:pPr algn="ctr"/>
+            <a:r>
+              <a:rPr lang="en-US" sz="2400" b="1" dirty="0">
+                <a:solidFill>
+                  <a:srgbClr val="000066"/>
+                </a:solidFill>
+                <a:latin typeface="+mj-lt"/>
+                <a:ea typeface="Microsoft JhengHei" panose="020B0604030504040204" pitchFamily="34" charset="-120"/>
+              </a:rPr>
+              <a:t>( </a:t>
+            </a:r>
+            <a:r>
+              <a:rPr lang="en-US" altLang="zh-CN" sz="2400" b="1" dirty="0" smtClean="0">
+                <a:solidFill>
+                  <a:srgbClr val="000066"/>
+                </a:solidFill>
+                <a:latin typeface="+mj-lt"/>
+                <a:ea typeface="Microsoft JhengHei" panose="020B0604030504040204" pitchFamily="34" charset="-120"/>
+              </a:rPr>
+              <a:t>1 / 4</a:t>
+            </a:r>
+            <a:r>
+              <a:rPr lang="en-US" sz="2400" b="1" dirty="0" smtClean="0">
+                <a:solidFill>
+                  <a:srgbClr val="000066"/>
+                </a:solidFill>
+                <a:latin typeface="+mj-lt"/>
+                <a:ea typeface="Microsoft JhengHei" panose="020B0604030504040204" pitchFamily="34" charset="-120"/>
+              </a:rPr>
+              <a:t> </a:t>
+            </a:r>
+            <a:r>
+              <a:rPr lang="en-US" sz="2400" b="1" dirty="0">
+                <a:solidFill>
+                  <a:srgbClr val="000066"/>
+                </a:solidFill>
+                <a:latin typeface="+mj-lt"/>
+                <a:ea typeface="Microsoft JhengHei" panose="020B0604030504040204" pitchFamily="34" charset="-120"/>
+              </a:rPr>
+              <a:t>)</a:t>
+            </a:r>
+            <a:endParaRPr lang="vi-VN" sz="2400" b="1" dirty="0">
+              <a:solidFill>
+                <a:srgbClr val="000066"/>
+              </a:solidFill>
+              <a:latin typeface="+mj-lt"/>
+              <a:ea typeface="Microsoft JhengHei" panose="020B0604030504040204" pitchFamily="34" charset="-120"/>
+            </a:endParaRPr>
+          </a:p>
+        </p:txBody>
+      </p:sp>
     </p:spTree>
     <p:extLst>
       <p:ext uri="{BB962C8B-B14F-4D97-AF65-F5344CB8AC3E}">
-        <p14:creationId xmlns:p14="http://schemas.microsoft.com/office/powerpoint/2010/main" val="2401338106"/>
+        <p14:creationId xmlns:p14="http://schemas.microsoft.com/office/powerpoint/2010/main" val="2898554723"/>
       </p:ext>
     </p:extLst>
   </p:cSld>
@@ -3445,7 +4073,13 @@
   <p:cSld>
     <p:spTree>
       <p:nvGrpSpPr>
-        <p:cNvPr id="1" name=""/>
+        <p:cNvPr id="1" name="">
+          <a:extLst>
+            <a:ext uri="{FF2B5EF4-FFF2-40B4-BE49-F238E27FC236}">
+              <a16:creationId xmlns:a16="http://schemas.microsoft.com/office/drawing/2014/main" id="{499F6A04-361B-D03C-72FC-83746A3861FC}"/>
+            </a:ext>
+          </a:extLst>
+        </p:cNvPr>
         <p:cNvGrpSpPr/>
         <p:nvPr/>
       </p:nvGrpSpPr>
@@ -3459,100 +4093,64 @@
       </p:grpSpPr>
       <p:sp>
         <p:nvSpPr>
-          <p:cNvPr id="2" name="Title 1"/>
-          <p:cNvSpPr>
-            <a:spLocks noGrp="1"/>
-          </p:cNvSpPr>
-          <p:nvPr>
-            <p:ph type="title"/>
-          </p:nvPr>
-        </p:nvSpPr>
-        <p:spPr/>
-        <p:txBody>
-          <a:bodyPr>
+          <p:cNvPr id="5" name="內容版面配置區 4">
+            <a:extLst>
+              <a:ext uri="{FF2B5EF4-FFF2-40B4-BE49-F238E27FC236}">
+                <a16:creationId xmlns:a16="http://schemas.microsoft.com/office/drawing/2014/main" id="{EE77592B-EE8B-614D-4160-CDFC7BCE80DB}"/>
+              </a:ext>
+            </a:extLst>
+          </p:cNvPr>
+          <p:cNvSpPr>
+            <a:spLocks noGrp="1"/>
+          </p:cNvSpPr>
+          <p:nvPr>
+            <p:ph idx="1"/>
+          </p:nvPr>
+        </p:nvSpPr>
+        <p:spPr>
+          <a:xfrm>
+            <a:off x="0" y="1563639"/>
+            <a:ext cx="9144000" cy="1803647"/>
+          </a:xfrm>
+        </p:spPr>
+        <p:txBody>
+          <a:bodyPr anchor="ctr">
             <a:normAutofit/>
           </a:bodyPr>
           <a:lstStyle/>
           <a:p>
-            <a:r>
-              <a:rPr lang="zh-TW" altLang="en-US" sz="4000" b="1" dirty="0">
+            <a:pPr algn="ctr">
+              <a:buNone/>
+            </a:pPr>
+            <a:r>
+              <a:rPr lang="zh-TW" altLang="en-US" sz="4800" b="1" dirty="0">
                 <a:solidFill>
                   <a:srgbClr val="000066"/>
                 </a:solidFill>
                 <a:latin typeface="微軟正黑體" pitchFamily="34" charset="-120"/>
                 <a:ea typeface="微軟正黑體" pitchFamily="34" charset="-120"/>
               </a:rPr>
-              <a:t>奇異恩典</a:t>
-            </a:r>
-            <a:r>
-              <a:rPr lang="zh-CN" altLang="en-US" sz="4000" b="1" dirty="0">
+              <a:t>前我失喪 </a:t>
+            </a:r>
+            <a:r>
+              <a:rPr lang="zh-TW" altLang="en-US" sz="4800" b="1" dirty="0" smtClean="0">
                 <a:solidFill>
                   <a:srgbClr val="000066"/>
                 </a:solidFill>
                 <a:latin typeface="微軟正黑體" pitchFamily="34" charset="-120"/>
                 <a:ea typeface="微軟正黑體" pitchFamily="34" charset="-120"/>
               </a:rPr>
-              <a:t>（</a:t>
-            </a:r>
-            <a:r>
-              <a:rPr lang="zh-TW" altLang="en-US" sz="4000" b="1" dirty="0">
+              <a:t> 今</a:t>
+            </a:r>
+            <a:r>
+              <a:rPr lang="zh-TW" altLang="en-US" sz="4800" b="1" dirty="0">
                 <a:solidFill>
                   <a:srgbClr val="000066"/>
                 </a:solidFill>
                 <a:latin typeface="微軟正黑體" pitchFamily="34" charset="-120"/>
                 <a:ea typeface="微軟正黑體" pitchFamily="34" charset="-120"/>
               </a:rPr>
-              <a:t>不再綑綁</a:t>
-            </a:r>
-            <a:r>
-              <a:rPr lang="zh-CN" altLang="en-US" sz="4000" b="1" dirty="0">
-                <a:solidFill>
-                  <a:srgbClr val="000066"/>
-                </a:solidFill>
-                <a:latin typeface="微軟正黑體" pitchFamily="34" charset="-120"/>
-                <a:ea typeface="微軟正黑體" pitchFamily="34" charset="-120"/>
-              </a:rPr>
-              <a:t>）</a:t>
-            </a:r>
-            <a:endParaRPr lang="en-US" sz="4000" b="1" dirty="0">
-              <a:solidFill>
-                <a:srgbClr val="000066"/>
-              </a:solidFill>
-              <a:latin typeface="微軟正黑體" pitchFamily="34" charset="-120"/>
-              <a:ea typeface="微軟正黑體" pitchFamily="34" charset="-120"/>
-            </a:endParaRPr>
-          </a:p>
-        </p:txBody>
-      </p:sp>
-      <p:sp>
-        <p:nvSpPr>
-          <p:cNvPr id="3" name="Content Placeholder 2"/>
-          <p:cNvSpPr>
-            <a:spLocks noGrp="1"/>
-          </p:cNvSpPr>
-          <p:nvPr>
-            <p:ph idx="1"/>
-          </p:nvPr>
-        </p:nvSpPr>
-        <p:spPr/>
-        <p:txBody>
-          <a:bodyPr>
-            <a:noAutofit/>
-          </a:bodyPr>
-          <a:lstStyle/>
-          <a:p>
-            <a:pPr algn="ctr">
-              <a:buNone/>
-            </a:pPr>
-            <a:r>
-              <a:rPr lang="zh-TW" altLang="en-US" sz="4800" b="1" dirty="0">
-                <a:solidFill>
-                  <a:srgbClr val="000066"/>
-                </a:solidFill>
-                <a:latin typeface="微軟正黑體" pitchFamily="34" charset="-120"/>
-                <a:ea typeface="微軟正黑體" pitchFamily="34" charset="-120"/>
-              </a:rPr>
-              <a:t>不再有捆綁 我已得釋放 </a:t>
+              <a:t>被尋回 </a:t>
             </a:r>
             <a:endParaRPr lang="en-US" altLang="zh-TW" sz="4800" b="1" dirty="0">
               <a:solidFill>
@@ -3574,78 +4172,86 @@
                 <a:latin typeface="微軟正黑體" pitchFamily="34" charset="-120"/>
                 <a:ea typeface="微軟正黑體" pitchFamily="34" charset="-120"/>
               </a:rPr>
-              <a:t>我救主耶穌 已付代</a:t>
-            </a:r>
-            <a:r>
-              <a:rPr lang="zh-TW" altLang="en-US" sz="4800" b="1" dirty="0">
-                <a:solidFill>
-                  <a:srgbClr val="000066"/>
-                </a:solidFill>
-                <a:latin typeface="微軟正黑體" pitchFamily="34" charset="-120"/>
-                <a:ea typeface="微軟正黑體" pitchFamily="34" charset="-120"/>
-              </a:rPr>
-              <a:t>價</a:t>
-            </a:r>
-            <a:endParaRPr lang="en-US" altLang="zh-TW" sz="4800" b="1" dirty="0">
+              <a:t>瞎眼今得看見</a:t>
+            </a:r>
+          </a:p>
+        </p:txBody>
+      </p:sp>
+      <p:sp>
+        <p:nvSpPr>
+          <p:cNvPr id="3" name="TextBox 2">
+            <a:extLst>
+              <a:ext uri="{FF2B5EF4-FFF2-40B4-BE49-F238E27FC236}">
+                <a16:creationId xmlns:a16="http://schemas.microsoft.com/office/drawing/2014/main" id="{FA175DD0-F211-14DE-420F-4A50F79B6BD2}"/>
+              </a:ext>
+            </a:extLst>
+          </p:cNvPr>
+          <p:cNvSpPr txBox="1"/>
+          <p:nvPr/>
+        </p:nvSpPr>
+        <p:spPr>
+          <a:xfrm>
+            <a:off x="0" y="3867895"/>
+            <a:ext cx="9144000" cy="461665"/>
+          </a:xfrm>
+          <a:prstGeom prst="rect">
+            <a:avLst/>
+          </a:prstGeom>
+          <a:noFill/>
+        </p:spPr>
+        <p:txBody>
+          <a:bodyPr wrap="square" rtlCol="0">
+            <a:spAutoFit/>
+          </a:bodyPr>
+          <a:lstStyle/>
+          <a:p>
+            <a:pPr algn="ctr"/>
+            <a:r>
+              <a:rPr lang="en-US" sz="2400" b="1" dirty="0">
+                <a:solidFill>
+                  <a:srgbClr val="000066"/>
+                </a:solidFill>
+                <a:latin typeface="+mj-lt"/>
+                <a:ea typeface="Microsoft JhengHei" panose="020B0604030504040204" pitchFamily="34" charset="-120"/>
+              </a:rPr>
+              <a:t>( </a:t>
+            </a:r>
+            <a:r>
+              <a:rPr lang="en-US" altLang="zh-CN" sz="2400" b="1" dirty="0" smtClean="0">
+                <a:solidFill>
+                  <a:srgbClr val="000066"/>
+                </a:solidFill>
+                <a:latin typeface="+mj-lt"/>
+                <a:ea typeface="Microsoft JhengHei" panose="020B0604030504040204" pitchFamily="34" charset="-120"/>
+              </a:rPr>
+              <a:t>1 / 4</a:t>
+            </a:r>
+            <a:r>
+              <a:rPr lang="en-US" sz="2400" b="1" dirty="0" smtClean="0">
+                <a:solidFill>
+                  <a:srgbClr val="000066"/>
+                </a:solidFill>
+                <a:latin typeface="+mj-lt"/>
+                <a:ea typeface="Microsoft JhengHei" panose="020B0604030504040204" pitchFamily="34" charset="-120"/>
+              </a:rPr>
+              <a:t> </a:t>
+            </a:r>
+            <a:r>
+              <a:rPr lang="en-US" sz="2400" b="1" dirty="0">
+                <a:solidFill>
+                  <a:srgbClr val="000066"/>
+                </a:solidFill>
+                <a:latin typeface="+mj-lt"/>
+                <a:ea typeface="Microsoft JhengHei" panose="020B0604030504040204" pitchFamily="34" charset="-120"/>
+              </a:rPr>
+              <a:t>)</a:t>
+            </a:r>
+            <a:endParaRPr lang="vi-VN" sz="2400" b="1" dirty="0">
               <a:solidFill>
                 <a:srgbClr val="000066"/>
               </a:solidFill>
-              <a:latin typeface="微軟正黑體" pitchFamily="34" charset="-120"/>
-              <a:ea typeface="微軟正黑體" pitchFamily="34" charset="-120"/>
-            </a:endParaRPr>
-          </a:p>
-          <a:p>
-            <a:pPr algn="ctr">
-              <a:buNone/>
-            </a:pPr>
-            <a:r>
-              <a:rPr lang="zh-TW" altLang="en-US" sz="4800" b="1" dirty="0">
-                <a:solidFill>
-                  <a:srgbClr val="000066"/>
-                </a:solidFill>
-                <a:latin typeface="微軟正黑體" pitchFamily="34" charset="-120"/>
-                <a:ea typeface="微軟正黑體" pitchFamily="34" charset="-120"/>
-              </a:rPr>
-              <a:t>豐富恩典 今充滿我 </a:t>
-            </a:r>
-            <a:endParaRPr lang="en-US" altLang="zh-TW" sz="4800" b="1" dirty="0">
-              <a:solidFill>
-                <a:srgbClr val="000066"/>
-              </a:solidFill>
-              <a:latin typeface="微軟正黑體" pitchFamily="34" charset="-120"/>
-              <a:ea typeface="微軟正黑體" pitchFamily="34" charset="-120"/>
-            </a:endParaRPr>
-          </a:p>
-          <a:p>
-            <a:pPr algn="ctr">
-              <a:buNone/>
-            </a:pPr>
-            <a:r>
-              <a:rPr lang="zh-TW" altLang="en-US" sz="4800" b="1" dirty="0">
-                <a:solidFill>
-                  <a:srgbClr val="000066"/>
-                </a:solidFill>
-                <a:latin typeface="微軟正黑體" pitchFamily="34" charset="-120"/>
-                <a:ea typeface="微軟正黑體" pitchFamily="34" charset="-120"/>
-              </a:rPr>
-              <a:t>永恆的愛 奇異恩</a:t>
-            </a:r>
-            <a:r>
-              <a:rPr lang="zh-TW" altLang="en-US" sz="4800" b="1" dirty="0">
-                <a:solidFill>
-                  <a:srgbClr val="000066"/>
-                </a:solidFill>
-                <a:latin typeface="微軟正黑體" pitchFamily="34" charset="-120"/>
-                <a:ea typeface="微軟正黑體" pitchFamily="34" charset="-120"/>
-              </a:rPr>
-              <a:t>典</a:t>
-            </a:r>
-            <a:endParaRPr lang="zh-TW" altLang="en-US" sz="4800" b="1" dirty="0">
-              <a:solidFill>
-                <a:srgbClr val="000066"/>
-              </a:solidFill>
-              <a:latin typeface="微軟正黑體" pitchFamily="34" charset="-120"/>
-              <a:ea typeface="微軟正黑體" pitchFamily="34" charset="-120"/>
+              <a:latin typeface="+mj-lt"/>
+              <a:ea typeface="Microsoft JhengHei" panose="020B0604030504040204" pitchFamily="34" charset="-120"/>
             </a:endParaRPr>
           </a:p>
         </p:txBody>
@@ -3653,7 +4259,7 @@
     </p:spTree>
     <p:extLst>
       <p:ext uri="{BB962C8B-B14F-4D97-AF65-F5344CB8AC3E}">
-        <p14:creationId xmlns:p14="http://schemas.microsoft.com/office/powerpoint/2010/main" val="2259219574"/>
+        <p14:creationId xmlns:p14="http://schemas.microsoft.com/office/powerpoint/2010/main" val="3977892533"/>
       </p:ext>
     </p:extLst>
   </p:cSld>
@@ -3668,7 +4274,13 @@
   <p:cSld>
     <p:spTree>
       <p:nvGrpSpPr>
-        <p:cNvPr id="1" name=""/>
+        <p:cNvPr id="1" name="">
+          <a:extLst>
+            <a:ext uri="{FF2B5EF4-FFF2-40B4-BE49-F238E27FC236}">
+              <a16:creationId xmlns:a16="http://schemas.microsoft.com/office/drawing/2014/main" id="{499F6A04-361B-D03C-72FC-83746A3861FC}"/>
+            </a:ext>
+          </a:extLst>
+        </p:cNvPr>
         <p:cNvGrpSpPr/>
         <p:nvPr/>
       </p:nvGrpSpPr>
@@ -3682,62 +4294,66 @@
       </p:grpSpPr>
       <p:sp>
         <p:nvSpPr>
-          <p:cNvPr id="2" name="Title 1"/>
-          <p:cNvSpPr>
-            <a:spLocks noGrp="1"/>
-          </p:cNvSpPr>
-          <p:nvPr>
-            <p:ph type="title"/>
-          </p:nvPr>
-        </p:nvSpPr>
-        <p:spPr/>
-        <p:txBody>
-          <a:bodyPr>
+          <p:cNvPr id="5" name="內容版面配置區 4">
+            <a:extLst>
+              <a:ext uri="{FF2B5EF4-FFF2-40B4-BE49-F238E27FC236}">
+                <a16:creationId xmlns:a16="http://schemas.microsoft.com/office/drawing/2014/main" id="{EE77592B-EE8B-614D-4160-CDFC7BCE80DB}"/>
+              </a:ext>
+            </a:extLst>
+          </p:cNvPr>
+          <p:cNvSpPr>
+            <a:spLocks noGrp="1"/>
+          </p:cNvSpPr>
+          <p:nvPr>
+            <p:ph idx="1"/>
+          </p:nvPr>
+        </p:nvSpPr>
+        <p:spPr>
+          <a:xfrm>
+            <a:off x="0" y="1563639"/>
+            <a:ext cx="9144000" cy="1803647"/>
+          </a:xfrm>
+        </p:spPr>
+        <p:txBody>
+          <a:bodyPr anchor="ctr">
             <a:normAutofit/>
           </a:bodyPr>
           <a:lstStyle/>
           <a:p>
-            <a:r>
-              <a:rPr lang="zh-TW" altLang="en-US" sz="4000" b="1" dirty="0">
+            <a:pPr algn="ctr">
+              <a:buNone/>
+            </a:pPr>
+            <a:r>
+              <a:rPr lang="zh-CN" altLang="en-US" sz="4800" b="1" dirty="0">
                 <a:solidFill>
                   <a:srgbClr val="000066"/>
                 </a:solidFill>
                 <a:latin typeface="微軟正黑體" pitchFamily="34" charset="-120"/>
                 <a:ea typeface="微軟正黑體" pitchFamily="34" charset="-120"/>
               </a:rPr>
-              <a:t>奇異恩典</a:t>
-            </a:r>
-            <a:r>
-              <a:rPr lang="zh-CN" altLang="en-US" sz="4000" b="1" dirty="0">
+              <a:t>如此恩典 </a:t>
+            </a:r>
+            <a:r>
+              <a:rPr lang="zh-CN" altLang="en-US" sz="4800" b="1" dirty="0" smtClean="0">
                 <a:solidFill>
                   <a:srgbClr val="000066"/>
                 </a:solidFill>
                 <a:latin typeface="微軟正黑體" pitchFamily="34" charset="-120"/>
                 <a:ea typeface="微軟正黑體" pitchFamily="34" charset="-120"/>
               </a:rPr>
-              <a:t>（</a:t>
-            </a:r>
-            <a:r>
-              <a:rPr lang="zh-TW" altLang="en-US" sz="4000" b="1" dirty="0">
+              <a:t> 使</a:t>
+            </a:r>
+            <a:r>
+              <a:rPr lang="zh-CN" altLang="en-US" sz="4800" b="1" dirty="0">
                 <a:solidFill>
                   <a:srgbClr val="000066"/>
                 </a:solidFill>
                 <a:latin typeface="微軟正黑體" pitchFamily="34" charset="-120"/>
                 <a:ea typeface="微軟正黑體" pitchFamily="34" charset="-120"/>
               </a:rPr>
-              <a:t>不再綑綁</a:t>
-            </a:r>
-            <a:r>
-              <a:rPr lang="zh-CN" altLang="en-US" sz="4000" b="1" dirty="0">
-                <a:solidFill>
-                  <a:srgbClr val="000066"/>
-                </a:solidFill>
-                <a:latin typeface="微軟正黑體" pitchFamily="34" charset="-120"/>
-                <a:ea typeface="微軟正黑體" pitchFamily="34" charset="-120"/>
-              </a:rPr>
-              <a:t>）</a:t>
-            </a:r>
-            <a:endParaRPr lang="en-US" sz="4000" b="1" dirty="0">
+              <a:t>我敬畏 </a:t>
+            </a:r>
+            <a:endParaRPr lang="en-US" altLang="zh-CN" sz="4800" b="1" dirty="0">
               <a:solidFill>
                 <a:srgbClr val="000066"/>
               </a:solidFill>
@@ -3745,39 +4361,21 @@
               <a:ea typeface="微軟正黑體" pitchFamily="34" charset="-120"/>
             </a:endParaRPr>
           </a:p>
-        </p:txBody>
-      </p:sp>
-      <p:sp>
-        <p:nvSpPr>
-          <p:cNvPr id="3" name="Content Placeholder 2"/>
-          <p:cNvSpPr>
-            <a:spLocks noGrp="1"/>
-          </p:cNvSpPr>
-          <p:nvPr>
-            <p:ph idx="1"/>
-          </p:nvPr>
-        </p:nvSpPr>
-        <p:spPr/>
-        <p:txBody>
-          <a:bodyPr>
-            <a:noAutofit/>
-          </a:bodyPr>
-          <a:lstStyle/>
           <a:p>
             <a:pPr algn="ctr">
               <a:buNone/>
             </a:pPr>
             <a:r>
-              <a:rPr lang="zh-TW" altLang="en-US" sz="4800" b="1" dirty="0">
+              <a:rPr lang="zh-CN" altLang="en-US" sz="4800" b="1" dirty="0">
                 <a:solidFill>
                   <a:srgbClr val="000066"/>
                 </a:solidFill>
                 <a:latin typeface="微軟正黑體" pitchFamily="34" charset="-120"/>
                 <a:ea typeface="微軟正黑體" pitchFamily="34" charset="-120"/>
               </a:rPr>
-              <a:t>我主應許 美好無比 </a:t>
-            </a:r>
-            <a:endParaRPr lang="en-US" altLang="zh-TW" sz="4800" b="1" dirty="0">
+              <a:t>使我心得安慰</a:t>
+            </a:r>
+            <a:endParaRPr lang="en-US" altLang="zh-CN" sz="4800" b="1" dirty="0">
               <a:solidFill>
                 <a:srgbClr val="000066"/>
               </a:solidFill>
@@ -3785,90 +4383,83 @@
               <a:ea typeface="微軟正黑體" pitchFamily="34" charset="-120"/>
             </a:endParaRPr>
           </a:p>
-          <a:p>
-            <a:pPr algn="ctr">
-              <a:buNone/>
-            </a:pPr>
-            <a:r>
-              <a:rPr lang="zh-TW" altLang="en-US" sz="4800" b="1" dirty="0">
-                <a:solidFill>
-                  <a:srgbClr val="000066"/>
-                </a:solidFill>
-                <a:latin typeface="微軟正黑體" pitchFamily="34" charset="-120"/>
-                <a:ea typeface="微軟正黑體" pitchFamily="34" charset="-120"/>
-              </a:rPr>
-              <a:t>盼望永不失</a:t>
-            </a:r>
-            <a:r>
-              <a:rPr lang="zh-TW" altLang="en-US" sz="4800" b="1" dirty="0">
-                <a:solidFill>
-                  <a:srgbClr val="000066"/>
-                </a:solidFill>
-                <a:latin typeface="微軟正黑體" pitchFamily="34" charset="-120"/>
-                <a:ea typeface="微軟正黑體" pitchFamily="34" charset="-120"/>
-              </a:rPr>
-              <a:t>去</a:t>
-            </a:r>
-            <a:endParaRPr lang="en-US" altLang="zh-TW" sz="4800" b="1" dirty="0">
+        </p:txBody>
+      </p:sp>
+      <p:sp>
+        <p:nvSpPr>
+          <p:cNvPr id="3" name="TextBox 2">
+            <a:extLst>
+              <a:ext uri="{FF2B5EF4-FFF2-40B4-BE49-F238E27FC236}">
+                <a16:creationId xmlns:a16="http://schemas.microsoft.com/office/drawing/2014/main" id="{FA175DD0-F211-14DE-420F-4A50F79B6BD2}"/>
+              </a:ext>
+            </a:extLst>
+          </p:cNvPr>
+          <p:cNvSpPr txBox="1"/>
+          <p:nvPr/>
+        </p:nvSpPr>
+        <p:spPr>
+          <a:xfrm>
+            <a:off x="0" y="3867895"/>
+            <a:ext cx="9144000" cy="461665"/>
+          </a:xfrm>
+          <a:prstGeom prst="rect">
+            <a:avLst/>
+          </a:prstGeom>
+          <a:noFill/>
+        </p:spPr>
+        <p:txBody>
+          <a:bodyPr wrap="square" rtlCol="0">
+            <a:spAutoFit/>
+          </a:bodyPr>
+          <a:lstStyle/>
+          <a:p>
+            <a:pPr algn="ctr"/>
+            <a:r>
+              <a:rPr lang="en-US" sz="2400" b="1" dirty="0">
+                <a:solidFill>
+                  <a:srgbClr val="000066"/>
+                </a:solidFill>
+                <a:latin typeface="+mj-lt"/>
+                <a:ea typeface="Microsoft JhengHei" panose="020B0604030504040204" pitchFamily="34" charset="-120"/>
+              </a:rPr>
+              <a:t>( </a:t>
+            </a:r>
+            <a:r>
+              <a:rPr lang="en-US" altLang="zh-CN" sz="2400" b="1" dirty="0" smtClean="0">
+                <a:solidFill>
+                  <a:srgbClr val="000066"/>
+                </a:solidFill>
+                <a:latin typeface="+mj-lt"/>
+                <a:ea typeface="Microsoft JhengHei" panose="020B0604030504040204" pitchFamily="34" charset="-120"/>
+              </a:rPr>
+              <a:t>2 / 4</a:t>
+            </a:r>
+            <a:r>
+              <a:rPr lang="en-US" sz="2400" b="1" dirty="0" smtClean="0">
+                <a:solidFill>
+                  <a:srgbClr val="000066"/>
+                </a:solidFill>
+                <a:latin typeface="+mj-lt"/>
+                <a:ea typeface="Microsoft JhengHei" panose="020B0604030504040204" pitchFamily="34" charset="-120"/>
+              </a:rPr>
+              <a:t> </a:t>
+            </a:r>
+            <a:r>
+              <a:rPr lang="en-US" sz="2400" b="1" dirty="0">
+                <a:solidFill>
+                  <a:srgbClr val="000066"/>
+                </a:solidFill>
+                <a:latin typeface="+mj-lt"/>
+                <a:ea typeface="Microsoft JhengHei" panose="020B0604030504040204" pitchFamily="34" charset="-120"/>
+              </a:rPr>
+              <a:t>)</a:t>
+            </a:r>
+            <a:endParaRPr lang="vi-VN" sz="2400" b="1" dirty="0">
               <a:solidFill>
                 <a:srgbClr val="000066"/>
               </a:solidFill>
-              <a:latin typeface="微軟正黑體" pitchFamily="34" charset="-120"/>
-              <a:ea typeface="微軟正黑體" pitchFamily="34" charset="-120"/>
-            </a:endParaRPr>
-          </a:p>
-          <a:p>
-            <a:pPr algn="ctr">
-              <a:buNone/>
-            </a:pPr>
-            <a:r>
-              <a:rPr lang="zh-TW" altLang="en-US" sz="4800" b="1" dirty="0">
-                <a:solidFill>
-                  <a:srgbClr val="000066"/>
-                </a:solidFill>
-                <a:latin typeface="微軟正黑體" pitchFamily="34" charset="-120"/>
-                <a:ea typeface="微軟正黑體" pitchFamily="34" charset="-120"/>
-              </a:rPr>
-              <a:t>有主做為 盾牌福分 </a:t>
-            </a:r>
-            <a:endParaRPr lang="en-US" altLang="zh-TW" sz="4800" b="1" dirty="0">
-              <a:solidFill>
-                <a:srgbClr val="000066"/>
-              </a:solidFill>
-              <a:latin typeface="微軟正黑體" pitchFamily="34" charset="-120"/>
-              <a:ea typeface="微軟正黑體" pitchFamily="34" charset="-120"/>
-            </a:endParaRPr>
-          </a:p>
-          <a:p>
-            <a:pPr algn="ctr">
-              <a:buNone/>
-            </a:pPr>
-            <a:r>
-              <a:rPr lang="zh-TW" altLang="en-US" sz="4800" b="1" dirty="0">
-                <a:solidFill>
-                  <a:srgbClr val="000066"/>
-                </a:solidFill>
-                <a:latin typeface="微軟正黑體" pitchFamily="34" charset="-120"/>
-                <a:ea typeface="微軟正黑體" pitchFamily="34" charset="-120"/>
-              </a:rPr>
-              <a:t>我心不再畏</a:t>
-            </a:r>
-            <a:r>
-              <a:rPr lang="zh-TW" altLang="en-US" sz="4800" b="1" dirty="0">
-                <a:solidFill>
-                  <a:srgbClr val="000066"/>
-                </a:solidFill>
-                <a:latin typeface="微軟正黑體" pitchFamily="34" charset="-120"/>
-                <a:ea typeface="微軟正黑體" pitchFamily="34" charset="-120"/>
-              </a:rPr>
-              <a:t>懼</a:t>
-            </a:r>
-            <a:endParaRPr lang="zh-TW" altLang="en-US" sz="4800" b="1" dirty="0">
-              <a:solidFill>
-                <a:srgbClr val="000066"/>
-              </a:solidFill>
-              <a:latin typeface="微軟正黑體" pitchFamily="34" charset="-120"/>
-              <a:ea typeface="微軟正黑體" pitchFamily="34" charset="-120"/>
+              <a:latin typeface="+mj-lt"/>
+              <a:ea typeface="Microsoft JhengHei" panose="020B0604030504040204" pitchFamily="34" charset="-120"/>
             </a:endParaRPr>
           </a:p>
         </p:txBody>
@@ -3876,7 +4467,7 @@
     </p:spTree>
     <p:extLst>
       <p:ext uri="{BB962C8B-B14F-4D97-AF65-F5344CB8AC3E}">
-        <p14:creationId xmlns:p14="http://schemas.microsoft.com/office/powerpoint/2010/main" val="799627897"/>
+        <p14:creationId xmlns:p14="http://schemas.microsoft.com/office/powerpoint/2010/main" val="3579120313"/>
       </p:ext>
     </p:extLst>
   </p:cSld>
@@ -3891,7 +4482,13 @@
   <p:cSld>
     <p:spTree>
       <p:nvGrpSpPr>
-        <p:cNvPr id="1" name=""/>
+        <p:cNvPr id="1" name="">
+          <a:extLst>
+            <a:ext uri="{FF2B5EF4-FFF2-40B4-BE49-F238E27FC236}">
+              <a16:creationId xmlns:a16="http://schemas.microsoft.com/office/drawing/2014/main" id="{499F6A04-361B-D03C-72FC-83746A3861FC}"/>
+            </a:ext>
+          </a:extLst>
+        </p:cNvPr>
         <p:cNvGrpSpPr/>
         <p:nvPr/>
       </p:nvGrpSpPr>
@@ -3905,100 +4502,64 @@
       </p:grpSpPr>
       <p:sp>
         <p:nvSpPr>
-          <p:cNvPr id="2" name="Title 1"/>
-          <p:cNvSpPr>
-            <a:spLocks noGrp="1"/>
-          </p:cNvSpPr>
-          <p:nvPr>
-            <p:ph type="title"/>
-          </p:nvPr>
-        </p:nvSpPr>
-        <p:spPr/>
-        <p:txBody>
-          <a:bodyPr>
+          <p:cNvPr id="5" name="內容版面配置區 4">
+            <a:extLst>
+              <a:ext uri="{FF2B5EF4-FFF2-40B4-BE49-F238E27FC236}">
+                <a16:creationId xmlns:a16="http://schemas.microsoft.com/office/drawing/2014/main" id="{EE77592B-EE8B-614D-4160-CDFC7BCE80DB}"/>
+              </a:ext>
+            </a:extLst>
+          </p:cNvPr>
+          <p:cNvSpPr>
+            <a:spLocks noGrp="1"/>
+          </p:cNvSpPr>
+          <p:nvPr>
+            <p:ph idx="1"/>
+          </p:nvPr>
+        </p:nvSpPr>
+        <p:spPr>
+          <a:xfrm>
+            <a:off x="0" y="1563639"/>
+            <a:ext cx="9144000" cy="1803647"/>
+          </a:xfrm>
+        </p:spPr>
+        <p:txBody>
+          <a:bodyPr anchor="ctr">
             <a:normAutofit/>
           </a:bodyPr>
           <a:lstStyle/>
           <a:p>
-            <a:r>
-              <a:rPr lang="zh-TW" altLang="en-US" sz="4000" b="1" dirty="0">
+            <a:pPr algn="ctr">
+              <a:buNone/>
+            </a:pPr>
+            <a:r>
+              <a:rPr lang="zh-TW" altLang="en-US" sz="4800" b="1" dirty="0">
                 <a:solidFill>
                   <a:srgbClr val="000066"/>
                 </a:solidFill>
                 <a:latin typeface="微軟正黑體" pitchFamily="34" charset="-120"/>
                 <a:ea typeface="微軟正黑體" pitchFamily="34" charset="-120"/>
               </a:rPr>
-              <a:t>奇異恩典</a:t>
-            </a:r>
-            <a:r>
-              <a:rPr lang="zh-CN" altLang="en-US" sz="4000" b="1" dirty="0">
+              <a:t>初信之時 </a:t>
+            </a:r>
+            <a:r>
+              <a:rPr lang="zh-TW" altLang="en-US" sz="4800" b="1" dirty="0" smtClean="0">
                 <a:solidFill>
                   <a:srgbClr val="000066"/>
                 </a:solidFill>
                 <a:latin typeface="微軟正黑體" pitchFamily="34" charset="-120"/>
                 <a:ea typeface="微軟正黑體" pitchFamily="34" charset="-120"/>
               </a:rPr>
-              <a:t>（</a:t>
-            </a:r>
-            <a:r>
-              <a:rPr lang="zh-TW" altLang="en-US" sz="4000" b="1" dirty="0">
+              <a:t> 即</a:t>
+            </a:r>
+            <a:r>
+              <a:rPr lang="zh-TW" altLang="en-US" sz="4800" b="1" dirty="0">
                 <a:solidFill>
                   <a:srgbClr val="000066"/>
                 </a:solidFill>
                 <a:latin typeface="微軟正黑體" pitchFamily="34" charset="-120"/>
                 <a:ea typeface="微軟正黑體" pitchFamily="34" charset="-120"/>
               </a:rPr>
-              <a:t>不再綑綁</a:t>
-            </a:r>
-            <a:r>
-              <a:rPr lang="zh-CN" altLang="en-US" sz="4000" b="1" dirty="0">
-                <a:solidFill>
-                  <a:srgbClr val="000066"/>
-                </a:solidFill>
-                <a:latin typeface="微軟正黑體" pitchFamily="34" charset="-120"/>
-                <a:ea typeface="微軟正黑體" pitchFamily="34" charset="-120"/>
-              </a:rPr>
-              <a:t>）</a:t>
-            </a:r>
-            <a:endParaRPr lang="en-US" sz="4000" b="1" dirty="0">
-              <a:solidFill>
-                <a:srgbClr val="000066"/>
-              </a:solidFill>
-              <a:latin typeface="微軟正黑體" pitchFamily="34" charset="-120"/>
-              <a:ea typeface="微軟正黑體" pitchFamily="34" charset="-120"/>
-            </a:endParaRPr>
-          </a:p>
-        </p:txBody>
-      </p:sp>
-      <p:sp>
-        <p:nvSpPr>
-          <p:cNvPr id="3" name="Content Placeholder 2"/>
-          <p:cNvSpPr>
-            <a:spLocks noGrp="1"/>
-          </p:cNvSpPr>
-          <p:nvPr>
-            <p:ph idx="1"/>
-          </p:nvPr>
-        </p:nvSpPr>
-        <p:spPr/>
-        <p:txBody>
-          <a:bodyPr>
-            <a:noAutofit/>
-          </a:bodyPr>
-          <a:lstStyle/>
-          <a:p>
-            <a:pPr algn="ctr">
-              <a:buNone/>
-            </a:pPr>
-            <a:r>
-              <a:rPr lang="zh-TW" altLang="en-US" sz="4800" b="1" dirty="0">
-                <a:solidFill>
-                  <a:srgbClr val="000066"/>
-                </a:solidFill>
-                <a:latin typeface="微軟正黑體" pitchFamily="34" charset="-120"/>
-                <a:ea typeface="微軟正黑體" pitchFamily="34" charset="-120"/>
-              </a:rPr>
-              <a:t>不再有捆綁 我已得釋放 </a:t>
+              <a:t>蒙恩惠 </a:t>
             </a:r>
             <a:endParaRPr lang="en-US" altLang="zh-TW" sz="4800" b="1" dirty="0">
               <a:solidFill>
@@ -4020,71 +4581,7 @@
                 <a:latin typeface="微軟正黑體" pitchFamily="34" charset="-120"/>
                 <a:ea typeface="微軟正黑體" pitchFamily="34" charset="-120"/>
               </a:rPr>
-              <a:t>我救主耶穌 已付代</a:t>
-            </a:r>
-            <a:r>
-              <a:rPr lang="zh-TW" altLang="en-US" sz="4800" b="1" dirty="0">
-                <a:solidFill>
-                  <a:srgbClr val="000066"/>
-                </a:solidFill>
-                <a:latin typeface="微軟正黑體" pitchFamily="34" charset="-120"/>
-                <a:ea typeface="微軟正黑體" pitchFamily="34" charset="-120"/>
-              </a:rPr>
-              <a:t>價</a:t>
-            </a:r>
-            <a:endParaRPr lang="en-US" altLang="zh-TW" sz="4800" b="1" dirty="0">
-              <a:solidFill>
-                <a:srgbClr val="000066"/>
-              </a:solidFill>
-              <a:latin typeface="微軟正黑體" pitchFamily="34" charset="-120"/>
-              <a:ea typeface="微軟正黑體" pitchFamily="34" charset="-120"/>
-            </a:endParaRPr>
-          </a:p>
-          <a:p>
-            <a:pPr algn="ctr">
-              <a:buNone/>
-            </a:pPr>
-            <a:r>
-              <a:rPr lang="zh-TW" altLang="en-US" sz="4800" b="1" dirty="0">
-                <a:solidFill>
-                  <a:srgbClr val="000066"/>
-                </a:solidFill>
-                <a:latin typeface="微軟正黑體" pitchFamily="34" charset="-120"/>
-                <a:ea typeface="微軟正黑體" pitchFamily="34" charset="-120"/>
-              </a:rPr>
-              <a:t>豐富恩典 今充滿我 </a:t>
-            </a:r>
-            <a:endParaRPr lang="en-US" altLang="zh-TW" sz="4800" b="1" dirty="0">
-              <a:solidFill>
-                <a:srgbClr val="000066"/>
-              </a:solidFill>
-              <a:latin typeface="微軟正黑體" pitchFamily="34" charset="-120"/>
-              <a:ea typeface="微軟正黑體" pitchFamily="34" charset="-120"/>
-            </a:endParaRPr>
-          </a:p>
-          <a:p>
-            <a:pPr algn="ctr">
-              <a:buNone/>
-            </a:pPr>
-            <a:r>
-              <a:rPr lang="zh-TW" altLang="en-US" sz="4800" b="1" dirty="0">
-                <a:solidFill>
-                  <a:srgbClr val="000066"/>
-                </a:solidFill>
-                <a:latin typeface="微軟正黑體" pitchFamily="34" charset="-120"/>
-                <a:ea typeface="微軟正黑體" pitchFamily="34" charset="-120"/>
-              </a:rPr>
-              <a:t>永恆的愛 奇異恩</a:t>
-            </a:r>
-            <a:r>
-              <a:rPr lang="zh-TW" altLang="en-US" sz="4800" b="1" dirty="0">
-                <a:solidFill>
-                  <a:srgbClr val="000066"/>
-                </a:solidFill>
-                <a:latin typeface="微軟正黑體" pitchFamily="34" charset="-120"/>
-                <a:ea typeface="微軟正黑體" pitchFamily="34" charset="-120"/>
-              </a:rPr>
-              <a:t>典</a:t>
+              <a:t>真是何等寶貴</a:t>
             </a:r>
             <a:endParaRPr lang="zh-TW" altLang="en-US" sz="4800" b="1" dirty="0">
               <a:solidFill>
@@ -4096,10 +4593,89 @@
           </a:p>
         </p:txBody>
       </p:sp>
+      <p:sp>
+        <p:nvSpPr>
+          <p:cNvPr id="3" name="TextBox 2">
+            <a:extLst>
+              <a:ext uri="{FF2B5EF4-FFF2-40B4-BE49-F238E27FC236}">
+                <a16:creationId xmlns:a16="http://schemas.microsoft.com/office/drawing/2014/main" id="{FA175DD0-F211-14DE-420F-4A50F79B6BD2}"/>
+              </a:ext>
+            </a:extLst>
+          </p:cNvPr>
+          <p:cNvSpPr txBox="1"/>
+          <p:nvPr/>
+        </p:nvSpPr>
+        <p:spPr>
+          <a:xfrm>
+            <a:off x="0" y="3867895"/>
+            <a:ext cx="9144000" cy="461665"/>
+          </a:xfrm>
+          <a:prstGeom prst="rect">
+            <a:avLst/>
+          </a:prstGeom>
+          <a:noFill/>
+        </p:spPr>
+        <p:txBody>
+          <a:bodyPr wrap="square" rtlCol="0">
+            <a:spAutoFit/>
+          </a:bodyPr>
+          <a:lstStyle/>
+          <a:p>
+            <a:pPr algn="ctr"/>
+            <a:r>
+              <a:rPr lang="en-US" sz="2400" b="1" dirty="0">
+                <a:solidFill>
+                  <a:srgbClr val="000066"/>
+                </a:solidFill>
+                <a:latin typeface="+mj-lt"/>
+                <a:ea typeface="Microsoft JhengHei" panose="020B0604030504040204" pitchFamily="34" charset="-120"/>
+              </a:rPr>
+              <a:t>( </a:t>
+            </a:r>
+            <a:r>
+              <a:rPr lang="en-US" altLang="zh-CN" sz="2400" b="1" dirty="0" smtClean="0">
+                <a:solidFill>
+                  <a:srgbClr val="000066"/>
+                </a:solidFill>
+                <a:latin typeface="+mj-lt"/>
+                <a:ea typeface="Microsoft JhengHei" panose="020B0604030504040204" pitchFamily="34" charset="-120"/>
+              </a:rPr>
+              <a:t>2 / 4</a:t>
+            </a:r>
+            <a:r>
+              <a:rPr lang="en-US" sz="2400" b="1" dirty="0" smtClean="0">
+                <a:solidFill>
+                  <a:srgbClr val="000066"/>
+                </a:solidFill>
+                <a:latin typeface="+mj-lt"/>
+                <a:ea typeface="Microsoft JhengHei" panose="020B0604030504040204" pitchFamily="34" charset="-120"/>
+              </a:rPr>
+              <a:t> </a:t>
+            </a:r>
+            <a:r>
+              <a:rPr lang="en-US" sz="2400" b="1" dirty="0">
+                <a:solidFill>
+                  <a:srgbClr val="000066"/>
+                </a:solidFill>
+                <a:latin typeface="+mj-lt"/>
+                <a:ea typeface="Microsoft JhengHei" panose="020B0604030504040204" pitchFamily="34" charset="-120"/>
+              </a:rPr>
+              <a:t>)</a:t>
+            </a:r>
+            <a:endParaRPr lang="vi-VN" sz="2400" b="1" dirty="0">
+              <a:solidFill>
+                <a:srgbClr val="000066"/>
+              </a:solidFill>
+              <a:latin typeface="+mj-lt"/>
+              <a:ea typeface="Microsoft JhengHei" panose="020B0604030504040204" pitchFamily="34" charset="-120"/>
+            </a:endParaRPr>
+          </a:p>
+        </p:txBody>
+      </p:sp>
     </p:spTree>
     <p:extLst>
       <p:ext uri="{BB962C8B-B14F-4D97-AF65-F5344CB8AC3E}">
-        <p14:creationId xmlns:p14="http://schemas.microsoft.com/office/powerpoint/2010/main" val="1718160469"/>
+        <p14:creationId xmlns:p14="http://schemas.microsoft.com/office/powerpoint/2010/main" val="3773521609"/>
       </p:ext>
     </p:extLst>
   </p:cSld>
@@ -4114,7 +4690,13 @@
   <p:cSld>
     <p:spTree>
       <p:nvGrpSpPr>
-        <p:cNvPr id="1" name=""/>
+        <p:cNvPr id="1" name="">
+          <a:extLst>
+            <a:ext uri="{FF2B5EF4-FFF2-40B4-BE49-F238E27FC236}">
+              <a16:creationId xmlns:a16="http://schemas.microsoft.com/office/drawing/2014/main" id="{499F6A04-361B-D03C-72FC-83746A3861FC}"/>
+            </a:ext>
+          </a:extLst>
+        </p:cNvPr>
         <p:cNvGrpSpPr/>
         <p:nvPr/>
       </p:nvGrpSpPr>
@@ -4128,100 +4710,64 @@
       </p:grpSpPr>
       <p:sp>
         <p:nvSpPr>
-          <p:cNvPr id="2" name="Title 1"/>
-          <p:cNvSpPr>
-            <a:spLocks noGrp="1"/>
-          </p:cNvSpPr>
-          <p:nvPr>
-            <p:ph type="title"/>
-          </p:nvPr>
-        </p:nvSpPr>
-        <p:spPr/>
-        <p:txBody>
-          <a:bodyPr>
+          <p:cNvPr id="5" name="內容版面配置區 4">
+            <a:extLst>
+              <a:ext uri="{FF2B5EF4-FFF2-40B4-BE49-F238E27FC236}">
+                <a16:creationId xmlns:a16="http://schemas.microsoft.com/office/drawing/2014/main" id="{EE77592B-EE8B-614D-4160-CDFC7BCE80DB}"/>
+              </a:ext>
+            </a:extLst>
+          </p:cNvPr>
+          <p:cNvSpPr>
+            <a:spLocks noGrp="1"/>
+          </p:cNvSpPr>
+          <p:nvPr>
+            <p:ph idx="1"/>
+          </p:nvPr>
+        </p:nvSpPr>
+        <p:spPr>
+          <a:xfrm>
+            <a:off x="0" y="1563639"/>
+            <a:ext cx="9144000" cy="1803647"/>
+          </a:xfrm>
+        </p:spPr>
+        <p:txBody>
+          <a:bodyPr anchor="ctr">
             <a:normAutofit/>
           </a:bodyPr>
           <a:lstStyle/>
           <a:p>
-            <a:r>
-              <a:rPr lang="zh-TW" altLang="en-US" sz="4000" b="1" dirty="0">
+            <a:pPr algn="ctr">
+              <a:buNone/>
+            </a:pPr>
+            <a:r>
+              <a:rPr lang="zh-TW" altLang="en-US" sz="4800" b="1" dirty="0">
                 <a:solidFill>
                   <a:srgbClr val="000066"/>
                 </a:solidFill>
                 <a:latin typeface="微軟正黑體" pitchFamily="34" charset="-120"/>
                 <a:ea typeface="微軟正黑體" pitchFamily="34" charset="-120"/>
               </a:rPr>
-              <a:t>奇異恩典</a:t>
-            </a:r>
-            <a:r>
-              <a:rPr lang="zh-CN" altLang="en-US" sz="4000" b="1" dirty="0">
+              <a:t>不再有捆綁 </a:t>
+            </a:r>
+            <a:r>
+              <a:rPr lang="zh-TW" altLang="en-US" sz="4800" b="1" dirty="0" smtClean="0">
                 <a:solidFill>
                   <a:srgbClr val="000066"/>
                 </a:solidFill>
                 <a:latin typeface="微軟正黑體" pitchFamily="34" charset="-120"/>
                 <a:ea typeface="微軟正黑體" pitchFamily="34" charset="-120"/>
               </a:rPr>
-              <a:t>（</a:t>
-            </a:r>
-            <a:r>
-              <a:rPr lang="zh-TW" altLang="en-US" sz="4000" b="1" dirty="0">
+              <a:t> 我</a:t>
+            </a:r>
+            <a:r>
+              <a:rPr lang="zh-TW" altLang="en-US" sz="4800" b="1" dirty="0">
                 <a:solidFill>
                   <a:srgbClr val="000066"/>
                 </a:solidFill>
                 <a:latin typeface="微軟正黑體" pitchFamily="34" charset="-120"/>
                 <a:ea typeface="微軟正黑體" pitchFamily="34" charset="-120"/>
               </a:rPr>
-              <a:t>不再綑綁</a:t>
-            </a:r>
-            <a:r>
-              <a:rPr lang="zh-CN" altLang="en-US" sz="4000" b="1" dirty="0">
-                <a:solidFill>
-                  <a:srgbClr val="000066"/>
-                </a:solidFill>
-                <a:latin typeface="微軟正黑體" pitchFamily="34" charset="-120"/>
-                <a:ea typeface="微軟正黑體" pitchFamily="34" charset="-120"/>
-              </a:rPr>
-              <a:t>）</a:t>
-            </a:r>
-            <a:endParaRPr lang="en-US" sz="4000" b="1" dirty="0">
-              <a:solidFill>
-                <a:srgbClr val="000066"/>
-              </a:solidFill>
-              <a:latin typeface="微軟正黑體" pitchFamily="34" charset="-120"/>
-              <a:ea typeface="微軟正黑體" pitchFamily="34" charset="-120"/>
-            </a:endParaRPr>
-          </a:p>
-        </p:txBody>
-      </p:sp>
-      <p:sp>
-        <p:nvSpPr>
-          <p:cNvPr id="3" name="Content Placeholder 2"/>
-          <p:cNvSpPr>
-            <a:spLocks noGrp="1"/>
-          </p:cNvSpPr>
-          <p:nvPr>
-            <p:ph idx="1"/>
-          </p:nvPr>
-        </p:nvSpPr>
-        <p:spPr/>
-        <p:txBody>
-          <a:bodyPr>
-            <a:noAutofit/>
-          </a:bodyPr>
-          <a:lstStyle/>
-          <a:p>
-            <a:pPr algn="ctr">
-              <a:buNone/>
-            </a:pPr>
-            <a:r>
-              <a:rPr lang="zh-TW" altLang="en-US" sz="4800" b="1" dirty="0">
-                <a:solidFill>
-                  <a:srgbClr val="000066"/>
-                </a:solidFill>
-                <a:latin typeface="微軟正黑體" pitchFamily="34" charset="-120"/>
-                <a:ea typeface="微軟正黑體" pitchFamily="34" charset="-120"/>
-              </a:rPr>
-              <a:t>天地都會 漸漸廢去 </a:t>
+              <a:t>已得釋放 </a:t>
             </a:r>
             <a:endParaRPr lang="en-US" altLang="zh-TW" sz="4800" b="1" dirty="0">
               <a:solidFill>
@@ -4243,17 +4789,27 @@
                 <a:latin typeface="微軟正黑體" pitchFamily="34" charset="-120"/>
                 <a:ea typeface="微軟正黑體" pitchFamily="34" charset="-120"/>
               </a:rPr>
-              <a:t>但我主永長</a:t>
-            </a:r>
-            <a:r>
-              <a:rPr lang="zh-TW" altLang="en-US" sz="4800" b="1" dirty="0">
+              <a:t>我救主耶穌 </a:t>
+            </a:r>
+            <a:r>
+              <a:rPr lang="zh-TW" altLang="en-US" sz="4800" b="1" dirty="0" smtClean="0">
                 <a:solidFill>
                   <a:srgbClr val="000066"/>
                 </a:solidFill>
                 <a:latin typeface="微軟正黑體" pitchFamily="34" charset="-120"/>
                 <a:ea typeface="微軟正黑體" pitchFamily="34" charset="-120"/>
               </a:rPr>
-              <a:t>存</a:t>
+              <a:t> 已</a:t>
+            </a:r>
+            <a:r>
+              <a:rPr lang="zh-TW" altLang="en-US" sz="4800" b="1" dirty="0">
+                <a:solidFill>
+                  <a:srgbClr val="000066"/>
+                </a:solidFill>
+                <a:latin typeface="微軟正黑體" pitchFamily="34" charset="-120"/>
+                <a:ea typeface="微軟正黑體" pitchFamily="34" charset="-120"/>
+              </a:rPr>
+              <a:t>付代價</a:t>
             </a:r>
             <a:endParaRPr lang="en-US" altLang="zh-TW" sz="4800" b="1" dirty="0">
               <a:solidFill>
@@ -4263,76 +4819,12 @@
               <a:ea typeface="微軟正黑體" pitchFamily="34" charset="-120"/>
             </a:endParaRPr>
           </a:p>
-          <a:p>
-            <a:pPr algn="ctr">
-              <a:buNone/>
-            </a:pPr>
-            <a:r>
-              <a:rPr lang="zh-TW" altLang="en-US" sz="4800" b="1" dirty="0">
-                <a:solidFill>
-                  <a:srgbClr val="000066"/>
-                </a:solidFill>
-                <a:latin typeface="微軟正黑體" pitchFamily="34" charset="-120"/>
-                <a:ea typeface="微軟正黑體" pitchFamily="34" charset="-120"/>
-              </a:rPr>
-              <a:t>我的生命 有主看顧 </a:t>
-            </a:r>
-            <a:endParaRPr lang="en-US" altLang="zh-TW" sz="4800" b="1" dirty="0">
-              <a:solidFill>
-                <a:srgbClr val="000066"/>
-              </a:solidFill>
-              <a:latin typeface="微軟正黑體" pitchFamily="34" charset="-120"/>
-              <a:ea typeface="微軟正黑體" pitchFamily="34" charset="-120"/>
-            </a:endParaRPr>
-          </a:p>
-          <a:p>
-            <a:pPr algn="ctr">
-              <a:buNone/>
-            </a:pPr>
-            <a:r>
-              <a:rPr lang="zh-TW" altLang="en-US" sz="4800" b="1" dirty="0">
-                <a:solidFill>
-                  <a:srgbClr val="000066"/>
-                </a:solidFill>
-                <a:latin typeface="微軟正黑體" pitchFamily="34" charset="-120"/>
-                <a:ea typeface="微軟正黑體" pitchFamily="34" charset="-120"/>
-              </a:rPr>
-              <a:t>我永遠屬於祢</a:t>
-            </a:r>
-            <a:r>
-              <a:rPr lang="en-US" altLang="zh-TW" b="1" dirty="0">
-                <a:solidFill>
-                  <a:srgbClr val="000066"/>
-                </a:solidFill>
-                <a:latin typeface="微軟正黑體" pitchFamily="34" charset="-120"/>
-                <a:ea typeface="微軟正黑體" pitchFamily="34" charset="-120"/>
-              </a:rPr>
-              <a:t>(x3</a:t>
-            </a:r>
-            <a:r>
-              <a:rPr lang="en-US" altLang="zh-TW" b="1" dirty="0">
-                <a:solidFill>
-                  <a:srgbClr val="000066"/>
-                </a:solidFill>
-                <a:latin typeface="微軟正黑體" pitchFamily="34" charset="-120"/>
-                <a:ea typeface="微軟正黑體" pitchFamily="34" charset="-120"/>
-              </a:rPr>
-              <a:t>)</a:t>
-            </a:r>
-            <a:endParaRPr lang="zh-TW" altLang="en-US" sz="4800" b="1" dirty="0">
-              <a:solidFill>
-                <a:srgbClr val="000066"/>
-              </a:solidFill>
-              <a:latin typeface="微軟正黑體" pitchFamily="34" charset="-120"/>
-              <a:ea typeface="微軟正黑體" pitchFamily="34" charset="-120"/>
-            </a:endParaRPr>
-          </a:p>
         </p:txBody>
       </p:sp>
     </p:spTree>
     <p:extLst>
       <p:ext uri="{BB962C8B-B14F-4D97-AF65-F5344CB8AC3E}">
-        <p14:creationId xmlns:p14="http://schemas.microsoft.com/office/powerpoint/2010/main" val="2538738118"/>
+        <p14:creationId xmlns:p14="http://schemas.microsoft.com/office/powerpoint/2010/main" val="3769606464"/>
       </p:ext>
     </p:extLst>
   </p:cSld>
@@ -4347,7 +4839,13 @@
   <p:cSld>
     <p:spTree>
       <p:nvGrpSpPr>
-        <p:cNvPr id="1" name=""/>
+        <p:cNvPr id="1" name="">
+          <a:extLst>
+            <a:ext uri="{FF2B5EF4-FFF2-40B4-BE49-F238E27FC236}">
+              <a16:creationId xmlns:a16="http://schemas.microsoft.com/office/drawing/2014/main" id="{499F6A04-361B-D03C-72FC-83746A3861FC}"/>
+            </a:ext>
+          </a:extLst>
+        </p:cNvPr>
         <p:cNvGrpSpPr/>
         <p:nvPr/>
       </p:nvGrpSpPr>
@@ -4361,100 +4859,64 @@
       </p:grpSpPr>
       <p:sp>
         <p:nvSpPr>
-          <p:cNvPr id="2" name="Title 1"/>
-          <p:cNvSpPr>
-            <a:spLocks noGrp="1"/>
-          </p:cNvSpPr>
-          <p:nvPr>
-            <p:ph type="title"/>
-          </p:nvPr>
-        </p:nvSpPr>
-        <p:spPr/>
-        <p:txBody>
-          <a:bodyPr>
+          <p:cNvPr id="5" name="內容版面配置區 4">
+            <a:extLst>
+              <a:ext uri="{FF2B5EF4-FFF2-40B4-BE49-F238E27FC236}">
+                <a16:creationId xmlns:a16="http://schemas.microsoft.com/office/drawing/2014/main" id="{EE77592B-EE8B-614D-4160-CDFC7BCE80DB}"/>
+              </a:ext>
+            </a:extLst>
+          </p:cNvPr>
+          <p:cNvSpPr>
+            <a:spLocks noGrp="1"/>
+          </p:cNvSpPr>
+          <p:nvPr>
+            <p:ph idx="1"/>
+          </p:nvPr>
+        </p:nvSpPr>
+        <p:spPr>
+          <a:xfrm>
+            <a:off x="0" y="1563639"/>
+            <a:ext cx="9144000" cy="1803647"/>
+          </a:xfrm>
+        </p:spPr>
+        <p:txBody>
+          <a:bodyPr anchor="ctr">
             <a:normAutofit/>
           </a:bodyPr>
           <a:lstStyle/>
           <a:p>
-            <a:r>
-              <a:rPr lang="zh-TW" altLang="en-US" sz="4000" b="1" dirty="0">
+            <a:pPr algn="ctr">
+              <a:buNone/>
+            </a:pPr>
+            <a:r>
+              <a:rPr lang="zh-TW" altLang="en-US" sz="4800" b="1" dirty="0">
                 <a:solidFill>
                   <a:srgbClr val="000066"/>
                 </a:solidFill>
                 <a:latin typeface="微軟正黑體" pitchFamily="34" charset="-120"/>
                 <a:ea typeface="微軟正黑體" pitchFamily="34" charset="-120"/>
               </a:rPr>
-              <a:t>奇異恩典</a:t>
-            </a:r>
-            <a:r>
-              <a:rPr lang="zh-CN" altLang="en-US" sz="4000" b="1" dirty="0">
+              <a:t>豐富恩典 </a:t>
+            </a:r>
+            <a:r>
+              <a:rPr lang="zh-TW" altLang="en-US" sz="4800" b="1" dirty="0" smtClean="0">
                 <a:solidFill>
                   <a:srgbClr val="000066"/>
                 </a:solidFill>
                 <a:latin typeface="微軟正黑體" pitchFamily="34" charset="-120"/>
                 <a:ea typeface="微軟正黑體" pitchFamily="34" charset="-120"/>
               </a:rPr>
-              <a:t>（</a:t>
-            </a:r>
-            <a:r>
-              <a:rPr lang="zh-TW" altLang="en-US" sz="4000" b="1" dirty="0">
+              <a:t> 今</a:t>
+            </a:r>
+            <a:r>
+              <a:rPr lang="zh-TW" altLang="en-US" sz="4800" b="1" dirty="0">
                 <a:solidFill>
                   <a:srgbClr val="000066"/>
                 </a:solidFill>
                 <a:latin typeface="微軟正黑體" pitchFamily="34" charset="-120"/>
                 <a:ea typeface="微軟正黑體" pitchFamily="34" charset="-120"/>
               </a:rPr>
-              <a:t>不再綑綁</a:t>
-            </a:r>
-            <a:r>
-              <a:rPr lang="zh-CN" altLang="en-US" sz="4000" b="1" dirty="0">
-                <a:solidFill>
-                  <a:srgbClr val="000066"/>
-                </a:solidFill>
-                <a:latin typeface="微軟正黑體" pitchFamily="34" charset="-120"/>
-                <a:ea typeface="微軟正黑體" pitchFamily="34" charset="-120"/>
-              </a:rPr>
-              <a:t>）</a:t>
-            </a:r>
-            <a:endParaRPr lang="en-US" sz="4000" b="1" dirty="0">
-              <a:solidFill>
-                <a:srgbClr val="000066"/>
-              </a:solidFill>
-              <a:latin typeface="微軟正黑體" pitchFamily="34" charset="-120"/>
-              <a:ea typeface="微軟正黑體" pitchFamily="34" charset="-120"/>
-            </a:endParaRPr>
-          </a:p>
-        </p:txBody>
-      </p:sp>
-      <p:sp>
-        <p:nvSpPr>
-          <p:cNvPr id="3" name="Content Placeholder 2"/>
-          <p:cNvSpPr>
-            <a:spLocks noGrp="1"/>
-          </p:cNvSpPr>
-          <p:nvPr>
-            <p:ph idx="1"/>
-          </p:nvPr>
-        </p:nvSpPr>
-        <p:spPr/>
-        <p:txBody>
-          <a:bodyPr>
-            <a:noAutofit/>
-          </a:bodyPr>
-          <a:lstStyle/>
-          <a:p>
-            <a:pPr algn="ctr">
-              <a:buNone/>
-            </a:pPr>
-            <a:r>
-              <a:rPr lang="zh-TW" altLang="en-US" sz="4800" b="1" dirty="0">
-                <a:solidFill>
-                  <a:srgbClr val="000066"/>
-                </a:solidFill>
-                <a:latin typeface="微軟正黑體" pitchFamily="34" charset="-120"/>
-                <a:ea typeface="微軟正黑體" pitchFamily="34" charset="-120"/>
-              </a:rPr>
-              <a:t>不再有捆綁 我已得釋放 </a:t>
+              <a:t>充滿我 </a:t>
             </a:r>
             <a:endParaRPr lang="en-US" altLang="zh-TW" sz="4800" b="1" dirty="0">
               <a:solidFill>
@@ -4476,17 +4938,134 @@
                 <a:latin typeface="微軟正黑體" pitchFamily="34" charset="-120"/>
                 <a:ea typeface="微軟正黑體" pitchFamily="34" charset="-120"/>
               </a:rPr>
-              <a:t>我救主耶穌 已付代</a:t>
-            </a:r>
-            <a:r>
-              <a:rPr lang="zh-TW" altLang="en-US" sz="4800" b="1" dirty="0">
+              <a:t>永恆的愛 </a:t>
+            </a:r>
+            <a:r>
+              <a:rPr lang="zh-TW" altLang="en-US" sz="4800" b="1" dirty="0" smtClean="0">
                 <a:solidFill>
                   <a:srgbClr val="000066"/>
                 </a:solidFill>
                 <a:latin typeface="微軟正黑體" pitchFamily="34" charset="-120"/>
                 <a:ea typeface="微軟正黑體" pitchFamily="34" charset="-120"/>
               </a:rPr>
-              <a:t>價</a:t>
+              <a:t> 奇異</a:t>
+            </a:r>
+            <a:r>
+              <a:rPr lang="zh-TW" altLang="en-US" sz="4800" b="1" dirty="0">
+                <a:solidFill>
+                  <a:srgbClr val="000066"/>
+                </a:solidFill>
+                <a:latin typeface="微軟正黑體" pitchFamily="34" charset="-120"/>
+                <a:ea typeface="微軟正黑體" pitchFamily="34" charset="-120"/>
+              </a:rPr>
+              <a:t>恩典</a:t>
+            </a:r>
+            <a:endParaRPr lang="zh-TW" altLang="en-US" sz="4800" b="1" dirty="0">
+              <a:solidFill>
+                <a:srgbClr val="000066"/>
+              </a:solidFill>
+              <a:latin typeface="微軟正黑體" pitchFamily="34" charset="-120"/>
+              <a:ea typeface="微軟正黑體" pitchFamily="34" charset="-120"/>
+            </a:endParaRPr>
+          </a:p>
+        </p:txBody>
+      </p:sp>
+    </p:spTree>
+    <p:extLst>
+      <p:ext uri="{BB962C8B-B14F-4D97-AF65-F5344CB8AC3E}">
+        <p14:creationId xmlns:p14="http://schemas.microsoft.com/office/powerpoint/2010/main" val="2594953194"/>
+      </p:ext>
+    </p:extLst>
+  </p:cSld>
+  <p:clrMapOvr>
+    <a:masterClrMapping/>
+  </p:clrMapOvr>
+</p:sld>
+</file>
+
+<file path=ppt/slides/slide8.xml><?xml version="1.0" encoding="utf-8"?>
+<p:sld xmlns:a="http://schemas.openxmlformats.org/drawingml/2006/main" xmlns:r="http://schemas.openxmlformats.org/officeDocument/2006/relationships" xmlns:p="http://schemas.openxmlformats.org/presentationml/2006/main">
+  <p:cSld>
+    <p:spTree>
+      <p:nvGrpSpPr>
+        <p:cNvPr id="1" name="">
+          <a:extLst>
+            <a:ext uri="{FF2B5EF4-FFF2-40B4-BE49-F238E27FC236}">
+              <a16:creationId xmlns:a16="http://schemas.microsoft.com/office/drawing/2014/main" id="{499F6A04-361B-D03C-72FC-83746A3861FC}"/>
+            </a:ext>
+          </a:extLst>
+        </p:cNvPr>
+        <p:cNvGrpSpPr/>
+        <p:nvPr/>
+      </p:nvGrpSpPr>
+      <p:grpSpPr>
+        <a:xfrm>
+          <a:off x="0" y="0"/>
+          <a:ext cx="0" cy="0"/>
+          <a:chOff x="0" y="0"/>
+          <a:chExt cx="0" cy="0"/>
+        </a:xfrm>
+      </p:grpSpPr>
+      <p:sp>
+        <p:nvSpPr>
+          <p:cNvPr id="5" name="內容版面配置區 4">
+            <a:extLst>
+              <a:ext uri="{FF2B5EF4-FFF2-40B4-BE49-F238E27FC236}">
+                <a16:creationId xmlns:a16="http://schemas.microsoft.com/office/drawing/2014/main" id="{EE77592B-EE8B-614D-4160-CDFC7BCE80DB}"/>
+              </a:ext>
+            </a:extLst>
+          </p:cNvPr>
+          <p:cNvSpPr>
+            <a:spLocks noGrp="1"/>
+          </p:cNvSpPr>
+          <p:nvPr>
+            <p:ph idx="1"/>
+          </p:nvPr>
+        </p:nvSpPr>
+        <p:spPr>
+          <a:xfrm>
+            <a:off x="0" y="1563639"/>
+            <a:ext cx="9144000" cy="1803647"/>
+          </a:xfrm>
+        </p:spPr>
+        <p:txBody>
+          <a:bodyPr anchor="ctr">
+            <a:normAutofit/>
+          </a:bodyPr>
+          <a:lstStyle/>
+          <a:p>
+            <a:pPr algn="ctr">
+              <a:buNone/>
+            </a:pPr>
+            <a:r>
+              <a:rPr lang="zh-TW" altLang="en-US" sz="4800" b="1" dirty="0">
+                <a:solidFill>
+                  <a:srgbClr val="000066"/>
+                </a:solidFill>
+                <a:latin typeface="微軟正黑體" pitchFamily="34" charset="-120"/>
+                <a:ea typeface="微軟正黑體" pitchFamily="34" charset="-120"/>
+              </a:rPr>
+              <a:t>我主應許 </a:t>
+            </a:r>
+            <a:r>
+              <a:rPr lang="zh-TW" altLang="en-US" sz="4800" b="1" dirty="0" smtClean="0">
+                <a:solidFill>
+                  <a:srgbClr val="000066"/>
+                </a:solidFill>
+                <a:latin typeface="微軟正黑體" pitchFamily="34" charset="-120"/>
+                <a:ea typeface="微軟正黑體" pitchFamily="34" charset="-120"/>
+              </a:rPr>
+              <a:t> 美</a:t>
+            </a:r>
+            <a:r>
+              <a:rPr lang="zh-TW" altLang="en-US" sz="4800" b="1" dirty="0">
+                <a:solidFill>
+                  <a:srgbClr val="000066"/>
+                </a:solidFill>
+                <a:latin typeface="微軟正黑體" pitchFamily="34" charset="-120"/>
+                <a:ea typeface="微軟正黑體" pitchFamily="34" charset="-120"/>
+              </a:rPr>
+              <a:t>好無比 </a:t>
             </a:r>
             <a:endParaRPr lang="en-US" altLang="zh-TW" sz="4800" b="1" dirty="0">
               <a:solidFill>
@@ -4508,7 +5087,7 @@
                 <a:latin typeface="微軟正黑體" pitchFamily="34" charset="-120"/>
                 <a:ea typeface="微軟正黑體" pitchFamily="34" charset="-120"/>
               </a:rPr>
-              <a:t>豐富恩典 今充滿我 </a:t>
+              <a:t>盼望永不失去</a:t>
             </a:r>
             <a:endParaRPr lang="en-US" altLang="zh-TW" sz="4800" b="1" dirty="0">
               <a:solidFill>
@@ -4518,6 +5097,150 @@
               <a:ea typeface="微軟正黑體" pitchFamily="34" charset="-120"/>
             </a:endParaRPr>
           </a:p>
+        </p:txBody>
+      </p:sp>
+      <p:sp>
+        <p:nvSpPr>
+          <p:cNvPr id="3" name="TextBox 2">
+            <a:extLst>
+              <a:ext uri="{FF2B5EF4-FFF2-40B4-BE49-F238E27FC236}">
+                <a16:creationId xmlns:a16="http://schemas.microsoft.com/office/drawing/2014/main" id="{FA175DD0-F211-14DE-420F-4A50F79B6BD2}"/>
+              </a:ext>
+            </a:extLst>
+          </p:cNvPr>
+          <p:cNvSpPr txBox="1"/>
+          <p:nvPr/>
+        </p:nvSpPr>
+        <p:spPr>
+          <a:xfrm>
+            <a:off x="0" y="3867895"/>
+            <a:ext cx="9144000" cy="461665"/>
+          </a:xfrm>
+          <a:prstGeom prst="rect">
+            <a:avLst/>
+          </a:prstGeom>
+          <a:noFill/>
+        </p:spPr>
+        <p:txBody>
+          <a:bodyPr wrap="square" rtlCol="0">
+            <a:spAutoFit/>
+          </a:bodyPr>
+          <a:lstStyle/>
+          <a:p>
+            <a:pPr algn="ctr"/>
+            <a:r>
+              <a:rPr lang="en-US" sz="2400" b="1" dirty="0">
+                <a:solidFill>
+                  <a:srgbClr val="000066"/>
+                </a:solidFill>
+                <a:latin typeface="+mj-lt"/>
+                <a:ea typeface="Microsoft JhengHei" panose="020B0604030504040204" pitchFamily="34" charset="-120"/>
+              </a:rPr>
+              <a:t>( </a:t>
+            </a:r>
+            <a:r>
+              <a:rPr lang="en-US" altLang="zh-CN" sz="2400" b="1" dirty="0" smtClean="0">
+                <a:solidFill>
+                  <a:srgbClr val="000066"/>
+                </a:solidFill>
+                <a:latin typeface="+mj-lt"/>
+                <a:ea typeface="Microsoft JhengHei" panose="020B0604030504040204" pitchFamily="34" charset="-120"/>
+              </a:rPr>
+              <a:t>3 / 4</a:t>
+            </a:r>
+            <a:r>
+              <a:rPr lang="en-US" sz="2400" b="1" dirty="0" smtClean="0">
+                <a:solidFill>
+                  <a:srgbClr val="000066"/>
+                </a:solidFill>
+                <a:latin typeface="+mj-lt"/>
+                <a:ea typeface="Microsoft JhengHei" panose="020B0604030504040204" pitchFamily="34" charset="-120"/>
+              </a:rPr>
+              <a:t> </a:t>
+            </a:r>
+            <a:r>
+              <a:rPr lang="en-US" sz="2400" b="1" dirty="0">
+                <a:solidFill>
+                  <a:srgbClr val="000066"/>
+                </a:solidFill>
+                <a:latin typeface="+mj-lt"/>
+                <a:ea typeface="Microsoft JhengHei" panose="020B0604030504040204" pitchFamily="34" charset="-120"/>
+              </a:rPr>
+              <a:t>)</a:t>
+            </a:r>
+            <a:endParaRPr lang="vi-VN" sz="2400" b="1" dirty="0">
+              <a:solidFill>
+                <a:srgbClr val="000066"/>
+              </a:solidFill>
+              <a:latin typeface="+mj-lt"/>
+              <a:ea typeface="Microsoft JhengHei" panose="020B0604030504040204" pitchFamily="34" charset="-120"/>
+            </a:endParaRPr>
+          </a:p>
+        </p:txBody>
+      </p:sp>
+    </p:spTree>
+    <p:extLst>
+      <p:ext uri="{BB962C8B-B14F-4D97-AF65-F5344CB8AC3E}">
+        <p14:creationId xmlns:p14="http://schemas.microsoft.com/office/powerpoint/2010/main" val="1957100647"/>
+      </p:ext>
+    </p:extLst>
+  </p:cSld>
+  <p:clrMapOvr>
+    <a:masterClrMapping/>
+  </p:clrMapOvr>
+</p:sld>
+</file>
+
+<file path=ppt/slides/slide9.xml><?xml version="1.0" encoding="utf-8"?>
+<p:sld xmlns:a="http://schemas.openxmlformats.org/drawingml/2006/main" xmlns:r="http://schemas.openxmlformats.org/officeDocument/2006/relationships" xmlns:p="http://schemas.openxmlformats.org/presentationml/2006/main">
+  <p:cSld>
+    <p:spTree>
+      <p:nvGrpSpPr>
+        <p:cNvPr id="1" name="">
+          <a:extLst>
+            <a:ext uri="{FF2B5EF4-FFF2-40B4-BE49-F238E27FC236}">
+              <a16:creationId xmlns:a16="http://schemas.microsoft.com/office/drawing/2014/main" id="{499F6A04-361B-D03C-72FC-83746A3861FC}"/>
+            </a:ext>
+          </a:extLst>
+        </p:cNvPr>
+        <p:cNvGrpSpPr/>
+        <p:nvPr/>
+      </p:nvGrpSpPr>
+      <p:grpSpPr>
+        <a:xfrm>
+          <a:off x="0" y="0"/>
+          <a:ext cx="0" cy="0"/>
+          <a:chOff x="0" y="0"/>
+          <a:chExt cx="0" cy="0"/>
+        </a:xfrm>
+      </p:grpSpPr>
+      <p:sp>
+        <p:nvSpPr>
+          <p:cNvPr id="5" name="內容版面配置區 4">
+            <a:extLst>
+              <a:ext uri="{FF2B5EF4-FFF2-40B4-BE49-F238E27FC236}">
+                <a16:creationId xmlns:a16="http://schemas.microsoft.com/office/drawing/2014/main" id="{EE77592B-EE8B-614D-4160-CDFC7BCE80DB}"/>
+              </a:ext>
+            </a:extLst>
+          </p:cNvPr>
+          <p:cNvSpPr>
+            <a:spLocks noGrp="1"/>
+          </p:cNvSpPr>
+          <p:nvPr>
+            <p:ph idx="1"/>
+          </p:nvPr>
+        </p:nvSpPr>
+        <p:spPr>
+          <a:xfrm>
+            <a:off x="0" y="1563639"/>
+            <a:ext cx="9144000" cy="1803647"/>
+          </a:xfrm>
+        </p:spPr>
+        <p:txBody>
+          <a:bodyPr anchor="ctr">
+            <a:normAutofit/>
+          </a:bodyPr>
+          <a:lstStyle/>
           <a:p>
             <a:pPr algn="ctr">
               <a:buNone/>
@@ -4530,17 +5253,49 @@
                 <a:latin typeface="微軟正黑體" pitchFamily="34" charset="-120"/>
                 <a:ea typeface="微軟正黑體" pitchFamily="34" charset="-120"/>
               </a:rPr>
-              <a:t>永恆的愛 奇異恩</a:t>
-            </a:r>
-            <a:r>
-              <a:rPr lang="zh-TW" altLang="en-US" sz="4800" b="1" dirty="0">
+              <a:t>有主做為 </a:t>
+            </a:r>
+            <a:r>
+              <a:rPr lang="zh-TW" altLang="en-US" sz="4800" b="1" dirty="0" smtClean="0">
                 <a:solidFill>
                   <a:srgbClr val="000066"/>
                 </a:solidFill>
                 <a:latin typeface="微軟正黑體" pitchFamily="34" charset="-120"/>
                 <a:ea typeface="微軟正黑體" pitchFamily="34" charset="-120"/>
               </a:rPr>
-              <a:t>典</a:t>
+              <a:t> 盾</a:t>
+            </a:r>
+            <a:r>
+              <a:rPr lang="zh-TW" altLang="en-US" sz="4800" b="1" dirty="0">
+                <a:solidFill>
+                  <a:srgbClr val="000066"/>
+                </a:solidFill>
+                <a:latin typeface="微軟正黑體" pitchFamily="34" charset="-120"/>
+                <a:ea typeface="微軟正黑體" pitchFamily="34" charset="-120"/>
+              </a:rPr>
+              <a:t>牌福分 </a:t>
+            </a:r>
+            <a:endParaRPr lang="en-US" altLang="zh-TW" sz="4800" b="1" dirty="0">
+              <a:solidFill>
+                <a:srgbClr val="000066"/>
+              </a:solidFill>
+              <a:latin typeface="微軟正黑體" pitchFamily="34" charset="-120"/>
+              <a:ea typeface="微軟正黑體" pitchFamily="34" charset="-120"/>
+            </a:endParaRPr>
+          </a:p>
+          <a:p>
+            <a:pPr algn="ctr">
+              <a:buNone/>
+            </a:pPr>
+            <a:r>
+              <a:rPr lang="zh-TW" altLang="en-US" sz="4800" b="1" dirty="0">
+                <a:solidFill>
+                  <a:srgbClr val="000066"/>
+                </a:solidFill>
+                <a:latin typeface="微軟正黑體" pitchFamily="34" charset="-120"/>
+                <a:ea typeface="微軟正黑體" pitchFamily="34" charset="-120"/>
+              </a:rPr>
+              <a:t>我心不再畏懼</a:t>
             </a:r>
             <a:endParaRPr lang="zh-TW" altLang="en-US" sz="4800" b="1" dirty="0">
               <a:solidFill>
@@ -4552,10 +5307,89 @@
           </a:p>
         </p:txBody>
       </p:sp>
+      <p:sp>
+        <p:nvSpPr>
+          <p:cNvPr id="3" name="TextBox 2">
+            <a:extLst>
+              <a:ext uri="{FF2B5EF4-FFF2-40B4-BE49-F238E27FC236}">
+                <a16:creationId xmlns:a16="http://schemas.microsoft.com/office/drawing/2014/main" id="{FA175DD0-F211-14DE-420F-4A50F79B6BD2}"/>
+              </a:ext>
+            </a:extLst>
+          </p:cNvPr>
+          <p:cNvSpPr txBox="1"/>
+          <p:nvPr/>
+        </p:nvSpPr>
+        <p:spPr>
+          <a:xfrm>
+            <a:off x="0" y="3867895"/>
+            <a:ext cx="9144000" cy="461665"/>
+          </a:xfrm>
+          <a:prstGeom prst="rect">
+            <a:avLst/>
+          </a:prstGeom>
+          <a:noFill/>
+        </p:spPr>
+        <p:txBody>
+          <a:bodyPr wrap="square" rtlCol="0">
+            <a:spAutoFit/>
+          </a:bodyPr>
+          <a:lstStyle/>
+          <a:p>
+            <a:pPr algn="ctr"/>
+            <a:r>
+              <a:rPr lang="en-US" sz="2400" b="1" dirty="0">
+                <a:solidFill>
+                  <a:srgbClr val="000066"/>
+                </a:solidFill>
+                <a:latin typeface="+mj-lt"/>
+                <a:ea typeface="Microsoft JhengHei" panose="020B0604030504040204" pitchFamily="34" charset="-120"/>
+              </a:rPr>
+              <a:t>( </a:t>
+            </a:r>
+            <a:r>
+              <a:rPr lang="en-US" altLang="zh-CN" sz="2400" b="1" dirty="0" smtClean="0">
+                <a:solidFill>
+                  <a:srgbClr val="000066"/>
+                </a:solidFill>
+                <a:latin typeface="+mj-lt"/>
+                <a:ea typeface="Microsoft JhengHei" panose="020B0604030504040204" pitchFamily="34" charset="-120"/>
+              </a:rPr>
+              <a:t>3 / 4</a:t>
+            </a:r>
+            <a:r>
+              <a:rPr lang="en-US" sz="2400" b="1" dirty="0" smtClean="0">
+                <a:solidFill>
+                  <a:srgbClr val="000066"/>
+                </a:solidFill>
+                <a:latin typeface="+mj-lt"/>
+                <a:ea typeface="Microsoft JhengHei" panose="020B0604030504040204" pitchFamily="34" charset="-120"/>
+              </a:rPr>
+              <a:t> </a:t>
+            </a:r>
+            <a:r>
+              <a:rPr lang="en-US" sz="2400" b="1" dirty="0">
+                <a:solidFill>
+                  <a:srgbClr val="000066"/>
+                </a:solidFill>
+                <a:latin typeface="+mj-lt"/>
+                <a:ea typeface="Microsoft JhengHei" panose="020B0604030504040204" pitchFamily="34" charset="-120"/>
+              </a:rPr>
+              <a:t>)</a:t>
+            </a:r>
+            <a:endParaRPr lang="vi-VN" sz="2400" b="1" dirty="0">
+              <a:solidFill>
+                <a:srgbClr val="000066"/>
+              </a:solidFill>
+              <a:latin typeface="+mj-lt"/>
+              <a:ea typeface="Microsoft JhengHei" panose="020B0604030504040204" pitchFamily="34" charset="-120"/>
+            </a:endParaRPr>
+          </a:p>
+        </p:txBody>
+      </p:sp>
     </p:spTree>
     <p:extLst>
       <p:ext uri="{BB962C8B-B14F-4D97-AF65-F5344CB8AC3E}">
-        <p14:creationId xmlns:p14="http://schemas.microsoft.com/office/powerpoint/2010/main" val="514088655"/>
+        <p14:creationId xmlns:p14="http://schemas.microsoft.com/office/powerpoint/2010/main" val="1949808618"/>
       </p:ext>
     </p:extLst>
   </p:cSld>
